--- a/products/poster/EEID_Poster.pptx
+++ b/products/poster/EEID_Poster.pptx
@@ -8,15 +8,16 @@
     <p:sldId id="258" r:id="rId2"/>
     <p:sldId id="259" r:id="rId3"/>
     <p:sldId id="260" r:id="rId4"/>
-    <p:sldId id="261" r:id="rId5"/>
+    <p:sldId id="262" r:id="rId5"/>
+    <p:sldId id="261" r:id="rId6"/>
   </p:sldIdLst>
   <p:sldSz cx="32918400" cy="43891200"/>
   <p:notesSz cx="6858000" cy="9144000"/>
   <p:embeddedFontLst>
     <p:embeddedFont>
       <p:font typeface="Calibri (MS) Bold" panose="020F0702030404030204" pitchFamily="34" charset="0"/>
-      <p:regular r:id="rId6"/>
-      <p:bold r:id="rId7"/>
+      <p:regular r:id="rId7"/>
+      <p:bold r:id="rId8"/>
     </p:embeddedFont>
   </p:embeddedFontLst>
   <p:defaultTextStyle>
@@ -313,7 +314,7 @@
             <a:fld id="{1D8BD707-D9CF-40AE-B4C6-C98DA3205C09}" type="datetimeFigureOut">
               <a:rPr lang="en-US" smtClean="0"/>
               <a:pPr/>
-              <a:t>6/11/25</a:t>
+              <a:t>6/13/25</a:t>
             </a:fld>
             <a:endParaRPr lang="en-US"/>
           </a:p>
@@ -478,7 +479,7 @@
             <a:fld id="{1D8BD707-D9CF-40AE-B4C6-C98DA3205C09}" type="datetimeFigureOut">
               <a:rPr lang="en-US" smtClean="0"/>
               <a:pPr/>
-              <a:t>6/11/25</a:t>
+              <a:t>6/13/25</a:t>
             </a:fld>
             <a:endParaRPr lang="en-US"/>
           </a:p>
@@ -653,7 +654,7 @@
             <a:fld id="{1D8BD707-D9CF-40AE-B4C6-C98DA3205C09}" type="datetimeFigureOut">
               <a:rPr lang="en-US" smtClean="0"/>
               <a:pPr/>
-              <a:t>6/11/25</a:t>
+              <a:t>6/13/25</a:t>
             </a:fld>
             <a:endParaRPr lang="en-US"/>
           </a:p>
@@ -818,7 +819,7 @@
             <a:fld id="{1D8BD707-D9CF-40AE-B4C6-C98DA3205C09}" type="datetimeFigureOut">
               <a:rPr lang="en-US" smtClean="0"/>
               <a:pPr/>
-              <a:t>6/11/25</a:t>
+              <a:t>6/13/25</a:t>
             </a:fld>
             <a:endParaRPr lang="en-US"/>
           </a:p>
@@ -1060,7 +1061,7 @@
             <a:fld id="{1D8BD707-D9CF-40AE-B4C6-C98DA3205C09}" type="datetimeFigureOut">
               <a:rPr lang="en-US" smtClean="0"/>
               <a:pPr/>
-              <a:t>6/11/25</a:t>
+              <a:t>6/13/25</a:t>
             </a:fld>
             <a:endParaRPr lang="en-US"/>
           </a:p>
@@ -1342,7 +1343,7 @@
             <a:fld id="{1D8BD707-D9CF-40AE-B4C6-C98DA3205C09}" type="datetimeFigureOut">
               <a:rPr lang="en-US" smtClean="0"/>
               <a:pPr/>
-              <a:t>6/11/25</a:t>
+              <a:t>6/13/25</a:t>
             </a:fld>
             <a:endParaRPr lang="en-US"/>
           </a:p>
@@ -1758,7 +1759,7 @@
             <a:fld id="{1D8BD707-D9CF-40AE-B4C6-C98DA3205C09}" type="datetimeFigureOut">
               <a:rPr lang="en-US" smtClean="0"/>
               <a:pPr/>
-              <a:t>6/11/25</a:t>
+              <a:t>6/13/25</a:t>
             </a:fld>
             <a:endParaRPr lang="en-US"/>
           </a:p>
@@ -1872,7 +1873,7 @@
             <a:fld id="{1D8BD707-D9CF-40AE-B4C6-C98DA3205C09}" type="datetimeFigureOut">
               <a:rPr lang="en-US" smtClean="0"/>
               <a:pPr/>
-              <a:t>6/11/25</a:t>
+              <a:t>6/13/25</a:t>
             </a:fld>
             <a:endParaRPr lang="en-US"/>
           </a:p>
@@ -1964,7 +1965,7 @@
             <a:fld id="{1D8BD707-D9CF-40AE-B4C6-C98DA3205C09}" type="datetimeFigureOut">
               <a:rPr lang="en-US" smtClean="0"/>
               <a:pPr/>
-              <a:t>6/11/25</a:t>
+              <a:t>6/13/25</a:t>
             </a:fld>
             <a:endParaRPr lang="en-US"/>
           </a:p>
@@ -2236,7 +2237,7 @@
             <a:fld id="{1D8BD707-D9CF-40AE-B4C6-C98DA3205C09}" type="datetimeFigureOut">
               <a:rPr lang="en-US" smtClean="0"/>
               <a:pPr/>
-              <a:t>6/11/25</a:t>
+              <a:t>6/13/25</a:t>
             </a:fld>
             <a:endParaRPr lang="en-US"/>
           </a:p>
@@ -2485,7 +2486,7 @@
             <a:fld id="{1D8BD707-D9CF-40AE-B4C6-C98DA3205C09}" type="datetimeFigureOut">
               <a:rPr lang="en-US" smtClean="0"/>
               <a:pPr/>
-              <a:t>6/11/25</a:t>
+              <a:t>6/13/25</a:t>
             </a:fld>
             <a:endParaRPr lang="en-US"/>
           </a:p>
@@ -2693,7 +2694,7 @@
             <a:fld id="{1D8BD707-D9CF-40AE-B4C6-C98DA3205C09}" type="datetimeFigureOut">
               <a:rPr lang="en-US" smtClean="0"/>
               <a:pPr/>
-              <a:t>6/11/25</a:t>
+              <a:t>6/13/25</a:t>
             </a:fld>
             <a:endParaRPr lang="en-US"/>
           </a:p>
@@ -10662,6 +10663,2688 @@
         <p:cNvPr id="1" name="">
           <a:extLst>
             <a:ext uri="{FF2B5EF4-FFF2-40B4-BE49-F238E27FC236}">
+              <a16:creationId xmlns:a16="http://schemas.microsoft.com/office/drawing/2014/main" id="{41DA715F-A67B-243B-DDAA-101AC8A39FFE}"/>
+            </a:ext>
+          </a:extLst>
+        </p:cNvPr>
+        <p:cNvGrpSpPr/>
+        <p:nvPr/>
+      </p:nvGrpSpPr>
+      <p:grpSpPr>
+        <a:xfrm>
+          <a:off x="0" y="0"/>
+          <a:ext cx="0" cy="0"/>
+          <a:chOff x="0" y="0"/>
+          <a:chExt cx="0" cy="0"/>
+        </a:xfrm>
+      </p:grpSpPr>
+      <p:grpSp>
+        <p:nvGrpSpPr>
+          <p:cNvPr id="196" name="Group 10">
+            <a:extLst>
+              <a:ext uri="{FF2B5EF4-FFF2-40B4-BE49-F238E27FC236}">
+                <a16:creationId xmlns:a16="http://schemas.microsoft.com/office/drawing/2014/main" id="{6B23363C-1BA3-8512-241A-871F1A147420}"/>
+              </a:ext>
+            </a:extLst>
+          </p:cNvPr>
+          <p:cNvGrpSpPr/>
+          <p:nvPr/>
+        </p:nvGrpSpPr>
+        <p:grpSpPr>
+          <a:xfrm>
+            <a:off x="-56" y="7844508"/>
+            <a:ext cx="32918337" cy="36206136"/>
+            <a:chOff x="0" y="-93394"/>
+            <a:chExt cx="14643633" cy="1709221"/>
+          </a:xfrm>
+          <a:solidFill>
+            <a:schemeClr val="bg1"/>
+          </a:solidFill>
+        </p:grpSpPr>
+        <p:sp>
+          <p:nvSpPr>
+            <p:cNvPr id="197" name="Freeform 11">
+              <a:extLst>
+                <a:ext uri="{FF2B5EF4-FFF2-40B4-BE49-F238E27FC236}">
+                  <a16:creationId xmlns:a16="http://schemas.microsoft.com/office/drawing/2014/main" id="{55908AF6-B83B-6F26-C3A7-38C11F1A0272}"/>
+                </a:ext>
+              </a:extLst>
+            </p:cNvPr>
+            <p:cNvSpPr/>
+            <p:nvPr/>
+          </p:nvSpPr>
+          <p:spPr>
+            <a:xfrm>
+              <a:off x="0" y="0"/>
+              <a:ext cx="14643608" cy="1615821"/>
+            </a:xfrm>
+            <a:custGeom>
+              <a:avLst/>
+              <a:gdLst/>
+              <a:ahLst/>
+              <a:cxnLst/>
+              <a:rect l="l" t="t" r="r" b="b"/>
+              <a:pathLst>
+                <a:path w="14643608" h="1615821">
+                  <a:moveTo>
+                    <a:pt x="0" y="0"/>
+                  </a:moveTo>
+                  <a:lnTo>
+                    <a:pt x="14643608" y="0"/>
+                  </a:lnTo>
+                  <a:lnTo>
+                    <a:pt x="14643608" y="1615821"/>
+                  </a:lnTo>
+                  <a:lnTo>
+                    <a:pt x="0" y="1615821"/>
+                  </a:lnTo>
+                  <a:close/>
+                </a:path>
+              </a:pathLst>
+            </a:custGeom>
+            <a:grpFill/>
+          </p:spPr>
+          <p:txBody>
+            <a:bodyPr/>
+            <a:lstStyle/>
+            <a:p>
+              <a:endParaRPr lang="en-US" sz="1350" dirty="0"/>
+            </a:p>
+          </p:txBody>
+        </p:sp>
+        <p:sp>
+          <p:nvSpPr>
+            <p:cNvPr id="198" name="TextBox 12">
+              <a:extLst>
+                <a:ext uri="{FF2B5EF4-FFF2-40B4-BE49-F238E27FC236}">
+                  <a16:creationId xmlns:a16="http://schemas.microsoft.com/office/drawing/2014/main" id="{2D175C18-9192-90ED-DCE5-B0D4B4630676}"/>
+                </a:ext>
+              </a:extLst>
+            </p:cNvPr>
+            <p:cNvSpPr txBox="1"/>
+            <p:nvPr/>
+          </p:nvSpPr>
+          <p:spPr>
+            <a:xfrm>
+              <a:off x="0" y="-93394"/>
+              <a:ext cx="14643633" cy="1709221"/>
+            </a:xfrm>
+            <a:prstGeom prst="rect">
+              <a:avLst/>
+            </a:prstGeom>
+            <a:grpFill/>
+          </p:spPr>
+          <p:txBody>
+            <a:bodyPr lIns="42863" tIns="42863" rIns="42863" bIns="42863" rtlCol="0" anchor="ctr"/>
+            <a:lstStyle/>
+            <a:p>
+              <a:pPr algn="ctr">
+                <a:lnSpc>
+                  <a:spcPts val="5315"/>
+                </a:lnSpc>
+              </a:pPr>
+              <a:endParaRPr lang="en-US" sz="4430" spc="41" dirty="0">
+                <a:solidFill>
+                  <a:srgbClr val="000000"/>
+                </a:solidFill>
+                <a:latin typeface="Calibri (MS) Bold"/>
+              </a:endParaRPr>
+            </a:p>
+          </p:txBody>
+        </p:sp>
+      </p:grpSp>
+      <p:grpSp>
+        <p:nvGrpSpPr>
+          <p:cNvPr id="28" name="Group 10">
+            <a:extLst>
+              <a:ext uri="{FF2B5EF4-FFF2-40B4-BE49-F238E27FC236}">
+                <a16:creationId xmlns:a16="http://schemas.microsoft.com/office/drawing/2014/main" id="{5DCAAA33-107A-8BB7-803F-2CA22E1E8BAC}"/>
+              </a:ext>
+            </a:extLst>
+          </p:cNvPr>
+          <p:cNvGrpSpPr/>
+          <p:nvPr/>
+        </p:nvGrpSpPr>
+        <p:grpSpPr>
+          <a:xfrm>
+            <a:off x="0" y="6400800"/>
+            <a:ext cx="32918400" cy="2585346"/>
+            <a:chOff x="0" y="0"/>
+            <a:chExt cx="14643633" cy="1615827"/>
+          </a:xfrm>
+          <a:solidFill>
+            <a:srgbClr val="FFBA00"/>
+          </a:solidFill>
+        </p:grpSpPr>
+        <p:sp>
+          <p:nvSpPr>
+            <p:cNvPr id="42" name="Freeform 11">
+              <a:extLst>
+                <a:ext uri="{FF2B5EF4-FFF2-40B4-BE49-F238E27FC236}">
+                  <a16:creationId xmlns:a16="http://schemas.microsoft.com/office/drawing/2014/main" id="{B732E136-FEE0-D12B-7FD9-09AED22C96DC}"/>
+                </a:ext>
+              </a:extLst>
+            </p:cNvPr>
+            <p:cNvSpPr/>
+            <p:nvPr/>
+          </p:nvSpPr>
+          <p:spPr>
+            <a:xfrm>
+              <a:off x="0" y="0"/>
+              <a:ext cx="14643608" cy="1615821"/>
+            </a:xfrm>
+            <a:custGeom>
+              <a:avLst/>
+              <a:gdLst/>
+              <a:ahLst/>
+              <a:cxnLst/>
+              <a:rect l="l" t="t" r="r" b="b"/>
+              <a:pathLst>
+                <a:path w="14643608" h="1615821">
+                  <a:moveTo>
+                    <a:pt x="0" y="0"/>
+                  </a:moveTo>
+                  <a:lnTo>
+                    <a:pt x="14643608" y="0"/>
+                  </a:lnTo>
+                  <a:lnTo>
+                    <a:pt x="14643608" y="1615821"/>
+                  </a:lnTo>
+                  <a:lnTo>
+                    <a:pt x="0" y="1615821"/>
+                  </a:lnTo>
+                  <a:close/>
+                </a:path>
+              </a:pathLst>
+            </a:custGeom>
+            <a:grpFill/>
+          </p:spPr>
+          <p:txBody>
+            <a:bodyPr/>
+            <a:lstStyle/>
+            <a:p>
+              <a:endParaRPr lang="en-US" sz="1350" dirty="0"/>
+            </a:p>
+          </p:txBody>
+        </p:sp>
+        <p:sp>
+          <p:nvSpPr>
+            <p:cNvPr id="44" name="TextBox 12">
+              <a:extLst>
+                <a:ext uri="{FF2B5EF4-FFF2-40B4-BE49-F238E27FC236}">
+                  <a16:creationId xmlns:a16="http://schemas.microsoft.com/office/drawing/2014/main" id="{F811DD63-150C-EBB7-9B3D-727425105A1A}"/>
+                </a:ext>
+              </a:extLst>
+            </p:cNvPr>
+            <p:cNvSpPr txBox="1"/>
+            <p:nvPr/>
+          </p:nvSpPr>
+          <p:spPr>
+            <a:xfrm>
+              <a:off x="0" y="-123825"/>
+              <a:ext cx="14643633" cy="1739652"/>
+            </a:xfrm>
+            <a:prstGeom prst="rect">
+              <a:avLst/>
+            </a:prstGeom>
+            <a:grpFill/>
+          </p:spPr>
+          <p:txBody>
+            <a:bodyPr lIns="42863" tIns="42863" rIns="42863" bIns="42863" rtlCol="0" anchor="ctr"/>
+            <a:lstStyle/>
+            <a:p>
+              <a:pPr algn="ctr">
+                <a:lnSpc>
+                  <a:spcPts val="5315"/>
+                </a:lnSpc>
+              </a:pPr>
+              <a:endParaRPr lang="en-US" sz="4430" spc="41" dirty="0">
+                <a:solidFill>
+                  <a:srgbClr val="000000"/>
+                </a:solidFill>
+                <a:latin typeface="Calibri (MS) Bold"/>
+              </a:endParaRPr>
+            </a:p>
+          </p:txBody>
+        </p:sp>
+      </p:grpSp>
+      <p:sp>
+        <p:nvSpPr>
+          <p:cNvPr id="176" name="TextBox 175">
+            <a:extLst>
+              <a:ext uri="{FF2B5EF4-FFF2-40B4-BE49-F238E27FC236}">
+                <a16:creationId xmlns:a16="http://schemas.microsoft.com/office/drawing/2014/main" id="{FFC36B3C-CC65-D670-9A16-47D4829CEFB7}"/>
+              </a:ext>
+            </a:extLst>
+          </p:cNvPr>
+          <p:cNvSpPr txBox="1"/>
+          <p:nvPr/>
+        </p:nvSpPr>
+        <p:spPr>
+          <a:xfrm>
+            <a:off x="20726400" y="7467600"/>
+            <a:ext cx="640414" cy="1569659"/>
+          </a:xfrm>
+          <a:prstGeom prst="rect">
+            <a:avLst/>
+          </a:prstGeom>
+          <a:noFill/>
+        </p:spPr>
+        <p:txBody>
+          <a:bodyPr wrap="square" rtlCol="0">
+            <a:spAutoFit/>
+          </a:bodyPr>
+          <a:lstStyle/>
+          <a:p>
+            <a:pPr algn="ctr"/>
+            <a:r>
+              <a:rPr lang="en-US" sz="9600" dirty="0">
+                <a:solidFill>
+                  <a:schemeClr val="bg1"/>
+                </a:solidFill>
+              </a:rPr>
+              <a:t>†</a:t>
+            </a:r>
+          </a:p>
+        </p:txBody>
+      </p:sp>
+      <p:sp>
+        <p:nvSpPr>
+          <p:cNvPr id="177" name="TextBox 12">
+            <a:extLst>
+              <a:ext uri="{FF2B5EF4-FFF2-40B4-BE49-F238E27FC236}">
+                <a16:creationId xmlns:a16="http://schemas.microsoft.com/office/drawing/2014/main" id="{18A2FFAA-C56B-E0C2-7922-0E566290CB0D}"/>
+              </a:ext>
+            </a:extLst>
+          </p:cNvPr>
+          <p:cNvSpPr txBox="1"/>
+          <p:nvPr/>
+        </p:nvSpPr>
+        <p:spPr>
+          <a:xfrm>
+            <a:off x="817482" y="2118146"/>
+            <a:ext cx="26574869" cy="3292054"/>
+          </a:xfrm>
+          <a:prstGeom prst="rect">
+            <a:avLst/>
+          </a:prstGeom>
+        </p:spPr>
+        <p:txBody>
+          <a:bodyPr lIns="42863" tIns="42863" rIns="42863" bIns="42863" rtlCol="0" anchor="ctr"/>
+          <a:lstStyle/>
+          <a:p>
+            <a:r>
+              <a:rPr lang="en-US" sz="9600" spc="41" dirty="0">
+                <a:solidFill>
+                  <a:schemeClr val="bg2"/>
+                </a:solidFill>
+                <a:latin typeface="Calibri (MS) Bold"/>
+              </a:rPr>
+              <a:t>Can we stop vaccinating against </a:t>
+            </a:r>
+          </a:p>
+          <a:p>
+            <a:r>
+              <a:rPr lang="en-US" sz="9600" spc="41" dirty="0">
+                <a:solidFill>
+                  <a:schemeClr val="bg2"/>
+                </a:solidFill>
+                <a:latin typeface="Calibri (MS) Bold"/>
+              </a:rPr>
+              <a:t>pox viruses?</a:t>
+            </a:r>
+          </a:p>
+        </p:txBody>
+      </p:sp>
+      <p:sp>
+        <p:nvSpPr>
+          <p:cNvPr id="178" name="TextBox 12">
+            <a:extLst>
+              <a:ext uri="{FF2B5EF4-FFF2-40B4-BE49-F238E27FC236}">
+                <a16:creationId xmlns:a16="http://schemas.microsoft.com/office/drawing/2014/main" id="{C446ADC1-DDA8-E887-F9AB-26C52374D02F}"/>
+              </a:ext>
+            </a:extLst>
+          </p:cNvPr>
+          <p:cNvSpPr txBox="1"/>
+          <p:nvPr/>
+        </p:nvSpPr>
+        <p:spPr>
+          <a:xfrm>
+            <a:off x="715936" y="-224412"/>
+            <a:ext cx="26574869" cy="3292054"/>
+          </a:xfrm>
+          <a:prstGeom prst="rect">
+            <a:avLst/>
+          </a:prstGeom>
+        </p:spPr>
+        <p:txBody>
+          <a:bodyPr lIns="42863" tIns="42863" rIns="42863" bIns="42863" rtlCol="0" anchor="ctr"/>
+          <a:lstStyle/>
+          <a:p>
+            <a:r>
+              <a:rPr lang="en-US" sz="11500" spc="41" dirty="0">
+                <a:solidFill>
+                  <a:schemeClr val="bg1">
+                    <a:lumMod val="95000"/>
+                  </a:schemeClr>
+                </a:solidFill>
+                <a:latin typeface="Calibri (MS) Bold"/>
+              </a:rPr>
+              <a:t>Vaccination to Prevent Disease Emergence</a:t>
+            </a:r>
+          </a:p>
+        </p:txBody>
+      </p:sp>
+      <p:grpSp>
+        <p:nvGrpSpPr>
+          <p:cNvPr id="199" name="Group 10">
+            <a:extLst>
+              <a:ext uri="{FF2B5EF4-FFF2-40B4-BE49-F238E27FC236}">
+                <a16:creationId xmlns:a16="http://schemas.microsoft.com/office/drawing/2014/main" id="{0A1B4D84-86FB-A57F-2A7C-8A720758A38C}"/>
+              </a:ext>
+            </a:extLst>
+          </p:cNvPr>
+          <p:cNvGrpSpPr/>
+          <p:nvPr/>
+        </p:nvGrpSpPr>
+        <p:grpSpPr>
+          <a:xfrm>
+            <a:off x="19230508" y="9280015"/>
+            <a:ext cx="13357690" cy="30172108"/>
+            <a:chOff x="0" y="-93394"/>
+            <a:chExt cx="14866869" cy="1709221"/>
+          </a:xfrm>
+          <a:solidFill>
+            <a:schemeClr val="bg2"/>
+          </a:solidFill>
+        </p:grpSpPr>
+        <p:sp>
+          <p:nvSpPr>
+            <p:cNvPr id="200" name="Freeform 11">
+              <a:extLst>
+                <a:ext uri="{FF2B5EF4-FFF2-40B4-BE49-F238E27FC236}">
+                  <a16:creationId xmlns:a16="http://schemas.microsoft.com/office/drawing/2014/main" id="{58B1AD5C-29DA-301E-DB6D-3118802CDA9D}"/>
+                </a:ext>
+              </a:extLst>
+            </p:cNvPr>
+            <p:cNvSpPr/>
+            <p:nvPr/>
+          </p:nvSpPr>
+          <p:spPr>
+            <a:xfrm>
+              <a:off x="0" y="0"/>
+              <a:ext cx="14643608" cy="1615821"/>
+            </a:xfrm>
+            <a:custGeom>
+              <a:avLst/>
+              <a:gdLst/>
+              <a:ahLst/>
+              <a:cxnLst/>
+              <a:rect l="l" t="t" r="r" b="b"/>
+              <a:pathLst>
+                <a:path w="14643608" h="1615821">
+                  <a:moveTo>
+                    <a:pt x="0" y="0"/>
+                  </a:moveTo>
+                  <a:lnTo>
+                    <a:pt x="14643608" y="0"/>
+                  </a:lnTo>
+                  <a:lnTo>
+                    <a:pt x="14643608" y="1615821"/>
+                  </a:lnTo>
+                  <a:lnTo>
+                    <a:pt x="0" y="1615821"/>
+                  </a:lnTo>
+                  <a:close/>
+                </a:path>
+              </a:pathLst>
+            </a:custGeom>
+            <a:grpFill/>
+            <a:ln>
+              <a:solidFill>
+                <a:schemeClr val="bg2"/>
+              </a:solidFill>
+            </a:ln>
+          </p:spPr>
+          <p:txBody>
+            <a:bodyPr/>
+            <a:lstStyle/>
+            <a:p>
+              <a:endParaRPr lang="en-US" sz="1350" dirty="0"/>
+            </a:p>
+          </p:txBody>
+        </p:sp>
+        <p:sp>
+          <p:nvSpPr>
+            <p:cNvPr id="201" name="TextBox 12">
+              <a:extLst>
+                <a:ext uri="{FF2B5EF4-FFF2-40B4-BE49-F238E27FC236}">
+                  <a16:creationId xmlns:a16="http://schemas.microsoft.com/office/drawing/2014/main" id="{12D10C1B-93CF-55B5-813B-CFEE37D7C820}"/>
+                </a:ext>
+              </a:extLst>
+            </p:cNvPr>
+            <p:cNvSpPr txBox="1"/>
+            <p:nvPr/>
+          </p:nvSpPr>
+          <p:spPr>
+            <a:xfrm>
+              <a:off x="0" y="-93394"/>
+              <a:ext cx="14866869" cy="1709221"/>
+            </a:xfrm>
+            <a:prstGeom prst="rect">
+              <a:avLst/>
+            </a:prstGeom>
+            <a:grpFill/>
+            <a:ln>
+              <a:solidFill>
+                <a:schemeClr val="bg2"/>
+              </a:solidFill>
+            </a:ln>
+          </p:spPr>
+          <p:txBody>
+            <a:bodyPr lIns="42863" tIns="42863" rIns="42863" bIns="42863" rtlCol="0" anchor="ctr"/>
+            <a:lstStyle/>
+            <a:p>
+              <a:pPr algn="ctr">
+                <a:lnSpc>
+                  <a:spcPts val="5315"/>
+                </a:lnSpc>
+              </a:pPr>
+              <a:endParaRPr lang="en-US" sz="4430" spc="41" dirty="0">
+                <a:solidFill>
+                  <a:srgbClr val="000000"/>
+                </a:solidFill>
+                <a:latin typeface="Calibri (MS) Bold"/>
+              </a:endParaRPr>
+            </a:p>
+          </p:txBody>
+        </p:sp>
+      </p:grpSp>
+      <p:grpSp>
+        <p:nvGrpSpPr>
+          <p:cNvPr id="214" name="Group 213">
+            <a:extLst>
+              <a:ext uri="{FF2B5EF4-FFF2-40B4-BE49-F238E27FC236}">
+                <a16:creationId xmlns:a16="http://schemas.microsoft.com/office/drawing/2014/main" id="{D66C26BC-059F-1E8C-2A1F-D546F3C1741F}"/>
+              </a:ext>
+            </a:extLst>
+          </p:cNvPr>
+          <p:cNvGrpSpPr/>
+          <p:nvPr/>
+        </p:nvGrpSpPr>
+        <p:grpSpPr>
+          <a:xfrm>
+            <a:off x="7239000" y="1335255"/>
+            <a:ext cx="24540877" cy="7395231"/>
+            <a:chOff x="7903512" y="165324"/>
+            <a:chExt cx="24540877" cy="7395231"/>
+          </a:xfrm>
+        </p:grpSpPr>
+        <p:grpSp>
+          <p:nvGrpSpPr>
+            <p:cNvPr id="158" name="Group 157">
+              <a:extLst>
+                <a:ext uri="{FF2B5EF4-FFF2-40B4-BE49-F238E27FC236}">
+                  <a16:creationId xmlns:a16="http://schemas.microsoft.com/office/drawing/2014/main" id="{16BEF6D2-C7C4-2FDA-38D0-2D983C40DE74}"/>
+                </a:ext>
+              </a:extLst>
+            </p:cNvPr>
+            <p:cNvGrpSpPr/>
+            <p:nvPr/>
+          </p:nvGrpSpPr>
+          <p:grpSpPr>
+            <a:xfrm rot="16200000">
+              <a:off x="15316598" y="-7247762"/>
+              <a:ext cx="7395231" cy="22221404"/>
+              <a:chOff x="4304531" y="396062"/>
+              <a:chExt cx="1457351" cy="4524127"/>
+            </a:xfrm>
+          </p:grpSpPr>
+          <p:cxnSp>
+            <p:nvCxnSpPr>
+              <p:cNvPr id="159" name="Straight Arrow Connector 158">
+                <a:extLst>
+                  <a:ext uri="{FF2B5EF4-FFF2-40B4-BE49-F238E27FC236}">
+                    <a16:creationId xmlns:a16="http://schemas.microsoft.com/office/drawing/2014/main" id="{699B3369-D559-1CC2-A5A1-5490A1D49256}"/>
+                  </a:ext>
+                </a:extLst>
+              </p:cNvPr>
+              <p:cNvCxnSpPr>
+                <a:cxnSpLocks/>
+              </p:cNvCxnSpPr>
+              <p:nvPr/>
+            </p:nvCxnSpPr>
+            <p:spPr>
+              <a:xfrm>
+                <a:off x="4793666" y="664142"/>
+                <a:ext cx="0" cy="496430"/>
+              </a:xfrm>
+              <a:prstGeom prst="straightConnector1">
+                <a:avLst/>
+              </a:prstGeom>
+              <a:ln w="76200">
+                <a:solidFill>
+                  <a:schemeClr val="bg1">
+                    <a:lumMod val="95000"/>
+                  </a:schemeClr>
+                </a:solidFill>
+                <a:tailEnd type="triangle"/>
+              </a:ln>
+            </p:spPr>
+            <p:style>
+              <a:lnRef idx="1">
+                <a:schemeClr val="dk1"/>
+              </a:lnRef>
+              <a:fillRef idx="0">
+                <a:schemeClr val="dk1"/>
+              </a:fillRef>
+              <a:effectRef idx="0">
+                <a:schemeClr val="dk1"/>
+              </a:effectRef>
+              <a:fontRef idx="minor">
+                <a:schemeClr val="tx1"/>
+              </a:fontRef>
+            </p:style>
+          </p:cxnSp>
+          <p:sp>
+            <p:nvSpPr>
+              <p:cNvPr id="160" name="Oval 159">
+                <a:extLst>
+                  <a:ext uri="{FF2B5EF4-FFF2-40B4-BE49-F238E27FC236}">
+                    <a16:creationId xmlns:a16="http://schemas.microsoft.com/office/drawing/2014/main" id="{E4E04C82-51F4-2493-049D-3BC19A54347E}"/>
+                  </a:ext>
+                </a:extLst>
+              </p:cNvPr>
+              <p:cNvSpPr/>
+              <p:nvPr/>
+            </p:nvSpPr>
+            <p:spPr>
+              <a:xfrm>
+                <a:off x="4714294" y="396062"/>
+                <a:ext cx="205539" cy="190500"/>
+              </a:xfrm>
+              <a:prstGeom prst="ellipse">
+                <a:avLst/>
+              </a:prstGeom>
+              <a:solidFill>
+                <a:schemeClr val="accent3"/>
+              </a:solidFill>
+              <a:ln>
+                <a:solidFill>
+                  <a:schemeClr val="tx1">
+                    <a:lumMod val="50000"/>
+                    <a:lumOff val="50000"/>
+                  </a:schemeClr>
+                </a:solidFill>
+              </a:ln>
+            </p:spPr>
+            <p:style>
+              <a:lnRef idx="0">
+                <a:scrgbClr r="0" g="0" b="0"/>
+              </a:lnRef>
+              <a:fillRef idx="0">
+                <a:scrgbClr r="0" g="0" b="0"/>
+              </a:fillRef>
+              <a:effectRef idx="0">
+                <a:scrgbClr r="0" g="0" b="0"/>
+              </a:effectRef>
+              <a:fontRef idx="minor">
+                <a:schemeClr val="lt1"/>
+              </a:fontRef>
+            </p:style>
+            <p:txBody>
+              <a:bodyPr rtlCol="0" anchor="ctr"/>
+              <a:lstStyle/>
+              <a:p>
+                <a:pPr algn="ctr"/>
+                <a:endParaRPr lang="en-US"/>
+              </a:p>
+            </p:txBody>
+          </p:sp>
+          <p:sp>
+            <p:nvSpPr>
+              <p:cNvPr id="161" name="Oval 160">
+                <a:extLst>
+                  <a:ext uri="{FF2B5EF4-FFF2-40B4-BE49-F238E27FC236}">
+                    <a16:creationId xmlns:a16="http://schemas.microsoft.com/office/drawing/2014/main" id="{859ED717-73E3-9FAB-719F-1193AC4BCEE2}"/>
+                  </a:ext>
+                </a:extLst>
+              </p:cNvPr>
+              <p:cNvSpPr/>
+              <p:nvPr/>
+            </p:nvSpPr>
+            <p:spPr>
+              <a:xfrm>
+                <a:off x="4714294" y="1264834"/>
+                <a:ext cx="205539" cy="190500"/>
+              </a:xfrm>
+              <a:prstGeom prst="ellipse">
+                <a:avLst/>
+              </a:prstGeom>
+              <a:solidFill>
+                <a:schemeClr val="bg2"/>
+              </a:solidFill>
+              <a:ln>
+                <a:solidFill>
+                  <a:schemeClr val="tx1">
+                    <a:lumMod val="50000"/>
+                    <a:lumOff val="50000"/>
+                  </a:schemeClr>
+                </a:solidFill>
+              </a:ln>
+            </p:spPr>
+            <p:style>
+              <a:lnRef idx="2">
+                <a:schemeClr val="accent1">
+                  <a:shade val="15000"/>
+                </a:schemeClr>
+              </a:lnRef>
+              <a:fillRef idx="1">
+                <a:schemeClr val="accent1"/>
+              </a:fillRef>
+              <a:effectRef idx="0">
+                <a:schemeClr val="accent1"/>
+              </a:effectRef>
+              <a:fontRef idx="minor">
+                <a:schemeClr val="lt1"/>
+              </a:fontRef>
+            </p:style>
+            <p:txBody>
+              <a:bodyPr rtlCol="0" anchor="ctr"/>
+              <a:lstStyle/>
+              <a:p>
+                <a:pPr algn="ctr"/>
+                <a:endParaRPr lang="en-US"/>
+              </a:p>
+            </p:txBody>
+          </p:sp>
+          <p:cxnSp>
+            <p:nvCxnSpPr>
+              <p:cNvPr id="162" name="Straight Arrow Connector 161">
+                <a:extLst>
+                  <a:ext uri="{FF2B5EF4-FFF2-40B4-BE49-F238E27FC236}">
+                    <a16:creationId xmlns:a16="http://schemas.microsoft.com/office/drawing/2014/main" id="{C48F0E2B-8B10-064E-814C-7555B98E0E65}"/>
+                  </a:ext>
+                </a:extLst>
+              </p:cNvPr>
+              <p:cNvCxnSpPr>
+                <a:cxnSpLocks/>
+              </p:cNvCxnSpPr>
+              <p:nvPr/>
+            </p:nvCxnSpPr>
+            <p:spPr>
+              <a:xfrm>
+                <a:off x="4793666" y="1532917"/>
+                <a:ext cx="0" cy="496428"/>
+              </a:xfrm>
+              <a:prstGeom prst="straightConnector1">
+                <a:avLst/>
+              </a:prstGeom>
+              <a:ln w="76200">
+                <a:solidFill>
+                  <a:schemeClr val="bg1">
+                    <a:lumMod val="95000"/>
+                  </a:schemeClr>
+                </a:solidFill>
+                <a:tailEnd type="triangle"/>
+              </a:ln>
+            </p:spPr>
+            <p:style>
+              <a:lnRef idx="1">
+                <a:schemeClr val="dk1"/>
+              </a:lnRef>
+              <a:fillRef idx="0">
+                <a:schemeClr val="dk1"/>
+              </a:fillRef>
+              <a:effectRef idx="0">
+                <a:schemeClr val="dk1"/>
+              </a:effectRef>
+              <a:fontRef idx="minor">
+                <a:schemeClr val="tx1"/>
+              </a:fontRef>
+            </p:style>
+          </p:cxnSp>
+          <p:sp>
+            <p:nvSpPr>
+              <p:cNvPr id="163" name="Oval 162">
+                <a:extLst>
+                  <a:ext uri="{FF2B5EF4-FFF2-40B4-BE49-F238E27FC236}">
+                    <a16:creationId xmlns:a16="http://schemas.microsoft.com/office/drawing/2014/main" id="{A2112D0A-F82F-43C8-B5CC-E1EC57A36BE7}"/>
+                  </a:ext>
+                </a:extLst>
+              </p:cNvPr>
+              <p:cNvSpPr/>
+              <p:nvPr/>
+            </p:nvSpPr>
+            <p:spPr>
+              <a:xfrm>
+                <a:off x="4707790" y="2117924"/>
+                <a:ext cx="205539" cy="190500"/>
+              </a:xfrm>
+              <a:prstGeom prst="ellipse">
+                <a:avLst/>
+              </a:prstGeom>
+              <a:solidFill>
+                <a:schemeClr val="bg2"/>
+              </a:solidFill>
+              <a:ln>
+                <a:solidFill>
+                  <a:schemeClr val="tx1">
+                    <a:lumMod val="50000"/>
+                    <a:lumOff val="50000"/>
+                  </a:schemeClr>
+                </a:solidFill>
+              </a:ln>
+            </p:spPr>
+            <p:style>
+              <a:lnRef idx="2">
+                <a:schemeClr val="accent1">
+                  <a:shade val="15000"/>
+                </a:schemeClr>
+              </a:lnRef>
+              <a:fillRef idx="1">
+                <a:schemeClr val="accent1"/>
+              </a:fillRef>
+              <a:effectRef idx="0">
+                <a:schemeClr val="accent1"/>
+              </a:effectRef>
+              <a:fontRef idx="minor">
+                <a:schemeClr val="lt1"/>
+              </a:fontRef>
+            </p:style>
+            <p:txBody>
+              <a:bodyPr rtlCol="0" anchor="ctr"/>
+              <a:lstStyle/>
+              <a:p>
+                <a:pPr algn="ctr"/>
+                <a:endParaRPr lang="en-US"/>
+              </a:p>
+            </p:txBody>
+          </p:sp>
+          <p:cxnSp>
+            <p:nvCxnSpPr>
+              <p:cNvPr id="164" name="Straight Arrow Connector 163">
+                <a:extLst>
+                  <a:ext uri="{FF2B5EF4-FFF2-40B4-BE49-F238E27FC236}">
+                    <a16:creationId xmlns:a16="http://schemas.microsoft.com/office/drawing/2014/main" id="{FC017030-7339-C850-9AA0-7DAD4342970E}"/>
+                  </a:ext>
+                </a:extLst>
+              </p:cNvPr>
+              <p:cNvCxnSpPr>
+                <a:cxnSpLocks/>
+              </p:cNvCxnSpPr>
+              <p:nvPr/>
+            </p:nvCxnSpPr>
+            <p:spPr>
+              <a:xfrm rot="5400000">
+                <a:off x="4374648" y="2475878"/>
+                <a:ext cx="436670" cy="227711"/>
+              </a:xfrm>
+              <a:prstGeom prst="straightConnector1">
+                <a:avLst/>
+              </a:prstGeom>
+              <a:ln w="76200">
+                <a:solidFill>
+                  <a:schemeClr val="bg1">
+                    <a:lumMod val="95000"/>
+                  </a:schemeClr>
+                </a:solidFill>
+                <a:tailEnd type="triangle"/>
+              </a:ln>
+            </p:spPr>
+            <p:style>
+              <a:lnRef idx="1">
+                <a:schemeClr val="dk1"/>
+              </a:lnRef>
+              <a:fillRef idx="0">
+                <a:schemeClr val="dk1"/>
+              </a:fillRef>
+              <a:effectRef idx="0">
+                <a:schemeClr val="dk1"/>
+              </a:effectRef>
+              <a:fontRef idx="minor">
+                <a:schemeClr val="tx1"/>
+              </a:fontRef>
+            </p:style>
+          </p:cxnSp>
+          <p:cxnSp>
+            <p:nvCxnSpPr>
+              <p:cNvPr id="165" name="Straight Arrow Connector 164">
+                <a:extLst>
+                  <a:ext uri="{FF2B5EF4-FFF2-40B4-BE49-F238E27FC236}">
+                    <a16:creationId xmlns:a16="http://schemas.microsoft.com/office/drawing/2014/main" id="{D98DAF12-8232-4259-EE4A-B4E191B55708}"/>
+                  </a:ext>
+                </a:extLst>
+              </p:cNvPr>
+              <p:cNvCxnSpPr>
+                <a:cxnSpLocks/>
+              </p:cNvCxnSpPr>
+              <p:nvPr/>
+            </p:nvCxnSpPr>
+            <p:spPr>
+              <a:xfrm rot="5400000" flipV="1">
+                <a:off x="4756278" y="2484115"/>
+                <a:ext cx="450566" cy="225134"/>
+              </a:xfrm>
+              <a:prstGeom prst="straightConnector1">
+                <a:avLst/>
+              </a:prstGeom>
+              <a:ln w="76200">
+                <a:solidFill>
+                  <a:schemeClr val="bg1">
+                    <a:lumMod val="95000"/>
+                  </a:schemeClr>
+                </a:solidFill>
+                <a:tailEnd type="triangle"/>
+              </a:ln>
+            </p:spPr>
+            <p:style>
+              <a:lnRef idx="1">
+                <a:schemeClr val="dk1"/>
+              </a:lnRef>
+              <a:fillRef idx="0">
+                <a:schemeClr val="dk1"/>
+              </a:fillRef>
+              <a:effectRef idx="0">
+                <a:schemeClr val="dk1"/>
+              </a:effectRef>
+              <a:fontRef idx="minor">
+                <a:schemeClr val="tx1"/>
+              </a:fontRef>
+            </p:style>
+          </p:cxnSp>
+          <p:sp>
+            <p:nvSpPr>
+              <p:cNvPr id="166" name="Oval 165">
+                <a:extLst>
+                  <a:ext uri="{FF2B5EF4-FFF2-40B4-BE49-F238E27FC236}">
+                    <a16:creationId xmlns:a16="http://schemas.microsoft.com/office/drawing/2014/main" id="{BF9DF4CD-14C8-37A3-2538-D4C912C978E0}"/>
+                  </a:ext>
+                </a:extLst>
+              </p:cNvPr>
+              <p:cNvSpPr/>
+              <p:nvPr/>
+            </p:nvSpPr>
+            <p:spPr>
+              <a:xfrm>
+                <a:off x="4304531" y="2827690"/>
+                <a:ext cx="205539" cy="190500"/>
+              </a:xfrm>
+              <a:prstGeom prst="ellipse">
+                <a:avLst/>
+              </a:prstGeom>
+              <a:solidFill>
+                <a:schemeClr val="accent5"/>
+              </a:solidFill>
+              <a:ln>
+                <a:solidFill>
+                  <a:schemeClr val="tx1">
+                    <a:lumMod val="50000"/>
+                    <a:lumOff val="50000"/>
+                  </a:schemeClr>
+                </a:solidFill>
+              </a:ln>
+            </p:spPr>
+            <p:style>
+              <a:lnRef idx="0">
+                <a:scrgbClr r="0" g="0" b="0"/>
+              </a:lnRef>
+              <a:fillRef idx="0">
+                <a:scrgbClr r="0" g="0" b="0"/>
+              </a:fillRef>
+              <a:effectRef idx="0">
+                <a:scrgbClr r="0" g="0" b="0"/>
+              </a:effectRef>
+              <a:fontRef idx="minor">
+                <a:schemeClr val="lt1"/>
+              </a:fontRef>
+            </p:style>
+            <p:txBody>
+              <a:bodyPr rtlCol="0" anchor="ctr"/>
+              <a:lstStyle/>
+              <a:p>
+                <a:pPr algn="ctr"/>
+                <a:endParaRPr lang="en-US"/>
+              </a:p>
+            </p:txBody>
+          </p:sp>
+          <p:sp>
+            <p:nvSpPr>
+              <p:cNvPr id="167" name="Oval 166">
+                <a:extLst>
+                  <a:ext uri="{FF2B5EF4-FFF2-40B4-BE49-F238E27FC236}">
+                    <a16:creationId xmlns:a16="http://schemas.microsoft.com/office/drawing/2014/main" id="{0180A4B5-2B3B-3F90-E420-9607CDA056C3}"/>
+                  </a:ext>
+                </a:extLst>
+              </p:cNvPr>
+              <p:cNvSpPr/>
+              <p:nvPr/>
+            </p:nvSpPr>
+            <p:spPr>
+              <a:xfrm>
+                <a:off x="5062818" y="2897308"/>
+                <a:ext cx="205539" cy="190500"/>
+              </a:xfrm>
+              <a:prstGeom prst="ellipse">
+                <a:avLst/>
+              </a:prstGeom>
+              <a:solidFill>
+                <a:schemeClr val="bg2"/>
+              </a:solidFill>
+              <a:ln>
+                <a:solidFill>
+                  <a:schemeClr val="tx1">
+                    <a:lumMod val="50000"/>
+                    <a:lumOff val="50000"/>
+                  </a:schemeClr>
+                </a:solidFill>
+              </a:ln>
+            </p:spPr>
+            <p:style>
+              <a:lnRef idx="2">
+                <a:schemeClr val="accent1">
+                  <a:shade val="15000"/>
+                </a:schemeClr>
+              </a:lnRef>
+              <a:fillRef idx="1">
+                <a:schemeClr val="accent1"/>
+              </a:fillRef>
+              <a:effectRef idx="0">
+                <a:schemeClr val="accent1"/>
+              </a:effectRef>
+              <a:fontRef idx="minor">
+                <a:schemeClr val="lt1"/>
+              </a:fontRef>
+            </p:style>
+            <p:txBody>
+              <a:bodyPr rtlCol="0" anchor="ctr"/>
+              <a:lstStyle/>
+              <a:p>
+                <a:pPr algn="ctr"/>
+                <a:endParaRPr lang="en-US"/>
+              </a:p>
+            </p:txBody>
+          </p:sp>
+          <p:cxnSp>
+            <p:nvCxnSpPr>
+              <p:cNvPr id="168" name="Straight Arrow Connector 167">
+                <a:extLst>
+                  <a:ext uri="{FF2B5EF4-FFF2-40B4-BE49-F238E27FC236}">
+                    <a16:creationId xmlns:a16="http://schemas.microsoft.com/office/drawing/2014/main" id="{D3357E25-82EA-1C19-53FC-EB43076BA239}"/>
+                  </a:ext>
+                </a:extLst>
+              </p:cNvPr>
+              <p:cNvCxnSpPr>
+                <a:cxnSpLocks/>
+              </p:cNvCxnSpPr>
+              <p:nvPr/>
+            </p:nvCxnSpPr>
+            <p:spPr>
+              <a:xfrm>
+                <a:off x="5183987" y="3192880"/>
+                <a:ext cx="0" cy="496428"/>
+              </a:xfrm>
+              <a:prstGeom prst="straightConnector1">
+                <a:avLst/>
+              </a:prstGeom>
+              <a:ln w="76200">
+                <a:solidFill>
+                  <a:schemeClr val="bg1">
+                    <a:lumMod val="95000"/>
+                  </a:schemeClr>
+                </a:solidFill>
+                <a:tailEnd type="triangle"/>
+              </a:ln>
+            </p:spPr>
+            <p:style>
+              <a:lnRef idx="1">
+                <a:schemeClr val="dk1"/>
+              </a:lnRef>
+              <a:fillRef idx="0">
+                <a:schemeClr val="dk1"/>
+              </a:fillRef>
+              <a:effectRef idx="0">
+                <a:schemeClr val="dk1"/>
+              </a:effectRef>
+              <a:fontRef idx="minor">
+                <a:schemeClr val="tx1"/>
+              </a:fontRef>
+            </p:style>
+          </p:cxnSp>
+          <p:sp>
+            <p:nvSpPr>
+              <p:cNvPr id="169" name="Oval 168">
+                <a:extLst>
+                  <a:ext uri="{FF2B5EF4-FFF2-40B4-BE49-F238E27FC236}">
+                    <a16:creationId xmlns:a16="http://schemas.microsoft.com/office/drawing/2014/main" id="{1385F145-BC91-628C-811D-D555A862889D}"/>
+                  </a:ext>
+                </a:extLst>
+              </p:cNvPr>
+              <p:cNvSpPr/>
+              <p:nvPr/>
+            </p:nvSpPr>
+            <p:spPr>
+              <a:xfrm>
+                <a:off x="5087890" y="3760560"/>
+                <a:ext cx="205539" cy="190500"/>
+              </a:xfrm>
+              <a:prstGeom prst="ellipse">
+                <a:avLst/>
+              </a:prstGeom>
+              <a:solidFill>
+                <a:schemeClr val="accent5"/>
+              </a:solidFill>
+              <a:ln>
+                <a:solidFill>
+                  <a:schemeClr val="tx1">
+                    <a:lumMod val="50000"/>
+                    <a:lumOff val="50000"/>
+                  </a:schemeClr>
+                </a:solidFill>
+              </a:ln>
+            </p:spPr>
+            <p:style>
+              <a:lnRef idx="0">
+                <a:scrgbClr r="0" g="0" b="0"/>
+              </a:lnRef>
+              <a:fillRef idx="0">
+                <a:scrgbClr r="0" g="0" b="0"/>
+              </a:fillRef>
+              <a:effectRef idx="0">
+                <a:scrgbClr r="0" g="0" b="0"/>
+              </a:effectRef>
+              <a:fontRef idx="minor">
+                <a:schemeClr val="lt1"/>
+              </a:fontRef>
+            </p:style>
+            <p:txBody>
+              <a:bodyPr rtlCol="0" anchor="ctr"/>
+              <a:lstStyle/>
+              <a:p>
+                <a:pPr algn="ctr"/>
+                <a:endParaRPr lang="en-US" dirty="0"/>
+              </a:p>
+            </p:txBody>
+          </p:sp>
+          <p:cxnSp>
+            <p:nvCxnSpPr>
+              <p:cNvPr id="170" name="Straight Arrow Connector 169">
+                <a:extLst>
+                  <a:ext uri="{FF2B5EF4-FFF2-40B4-BE49-F238E27FC236}">
+                    <a16:creationId xmlns:a16="http://schemas.microsoft.com/office/drawing/2014/main" id="{A4712AEE-9112-73BB-2CA7-288A5923058B}"/>
+                  </a:ext>
+                </a:extLst>
+              </p:cNvPr>
+              <p:cNvCxnSpPr>
+                <a:cxnSpLocks/>
+              </p:cNvCxnSpPr>
+              <p:nvPr/>
+            </p:nvCxnSpPr>
+            <p:spPr>
+              <a:xfrm rot="5400000">
+                <a:off x="4757753" y="4082426"/>
+                <a:ext cx="442840" cy="267314"/>
+              </a:xfrm>
+              <a:prstGeom prst="straightConnector1">
+                <a:avLst/>
+              </a:prstGeom>
+              <a:ln w="76200">
+                <a:solidFill>
+                  <a:schemeClr val="bg1">
+                    <a:lumMod val="95000"/>
+                  </a:schemeClr>
+                </a:solidFill>
+                <a:tailEnd type="triangle"/>
+              </a:ln>
+            </p:spPr>
+            <p:style>
+              <a:lnRef idx="1">
+                <a:schemeClr val="dk1"/>
+              </a:lnRef>
+              <a:fillRef idx="0">
+                <a:schemeClr val="dk1"/>
+              </a:fillRef>
+              <a:effectRef idx="0">
+                <a:schemeClr val="dk1"/>
+              </a:effectRef>
+              <a:fontRef idx="minor">
+                <a:schemeClr val="tx1"/>
+              </a:fontRef>
+            </p:style>
+          </p:cxnSp>
+          <p:cxnSp>
+            <p:nvCxnSpPr>
+              <p:cNvPr id="171" name="Straight Arrow Connector 170">
+                <a:extLst>
+                  <a:ext uri="{FF2B5EF4-FFF2-40B4-BE49-F238E27FC236}">
+                    <a16:creationId xmlns:a16="http://schemas.microsoft.com/office/drawing/2014/main" id="{91B79A5E-AE0A-1E5B-2BF5-86F3E1510CDC}"/>
+                  </a:ext>
+                </a:extLst>
+              </p:cNvPr>
+              <p:cNvCxnSpPr>
+                <a:cxnSpLocks/>
+              </p:cNvCxnSpPr>
+              <p:nvPr/>
+            </p:nvCxnSpPr>
+            <p:spPr>
+              <a:xfrm>
+                <a:off x="5268380" y="3994990"/>
+                <a:ext cx="275737" cy="442513"/>
+              </a:xfrm>
+              <a:prstGeom prst="straightConnector1">
+                <a:avLst/>
+              </a:prstGeom>
+              <a:ln w="76200">
+                <a:solidFill>
+                  <a:schemeClr val="bg1">
+                    <a:lumMod val="95000"/>
+                  </a:schemeClr>
+                </a:solidFill>
+                <a:tailEnd type="triangle"/>
+              </a:ln>
+            </p:spPr>
+            <p:style>
+              <a:lnRef idx="1">
+                <a:schemeClr val="dk1"/>
+              </a:lnRef>
+              <a:fillRef idx="0">
+                <a:schemeClr val="dk1"/>
+              </a:fillRef>
+              <a:effectRef idx="0">
+                <a:schemeClr val="dk1"/>
+              </a:effectRef>
+              <a:fontRef idx="minor">
+                <a:schemeClr val="tx1"/>
+              </a:fontRef>
+            </p:style>
+          </p:cxnSp>
+          <p:sp>
+            <p:nvSpPr>
+              <p:cNvPr id="172" name="Oval 171">
+                <a:extLst>
+                  <a:ext uri="{FF2B5EF4-FFF2-40B4-BE49-F238E27FC236}">
+                    <a16:creationId xmlns:a16="http://schemas.microsoft.com/office/drawing/2014/main" id="{279AB8BF-4B62-9272-6FE7-81A11A2B2F27}"/>
+                  </a:ext>
+                </a:extLst>
+              </p:cNvPr>
+              <p:cNvSpPr/>
+              <p:nvPr/>
+            </p:nvSpPr>
+            <p:spPr>
+              <a:xfrm>
+                <a:off x="4707790" y="4503470"/>
+                <a:ext cx="205539" cy="190500"/>
+              </a:xfrm>
+              <a:prstGeom prst="ellipse">
+                <a:avLst/>
+              </a:prstGeom>
+              <a:solidFill>
+                <a:schemeClr val="accent6"/>
+              </a:solidFill>
+              <a:ln>
+                <a:solidFill>
+                  <a:schemeClr val="tx1">
+                    <a:lumMod val="50000"/>
+                    <a:lumOff val="50000"/>
+                  </a:schemeClr>
+                </a:solidFill>
+              </a:ln>
+            </p:spPr>
+            <p:style>
+              <a:lnRef idx="0">
+                <a:scrgbClr r="0" g="0" b="0"/>
+              </a:lnRef>
+              <a:fillRef idx="0">
+                <a:scrgbClr r="0" g="0" b="0"/>
+              </a:fillRef>
+              <a:effectRef idx="0">
+                <a:scrgbClr r="0" g="0" b="0"/>
+              </a:effectRef>
+              <a:fontRef idx="minor">
+                <a:schemeClr val="lt1"/>
+              </a:fontRef>
+            </p:style>
+            <p:txBody>
+              <a:bodyPr rtlCol="0" anchor="ctr"/>
+              <a:lstStyle/>
+              <a:p>
+                <a:pPr algn="ctr"/>
+                <a:endParaRPr lang="en-US"/>
+              </a:p>
+            </p:txBody>
+          </p:sp>
+          <p:sp>
+            <p:nvSpPr>
+              <p:cNvPr id="173" name="Oval 172">
+                <a:extLst>
+                  <a:ext uri="{FF2B5EF4-FFF2-40B4-BE49-F238E27FC236}">
+                    <a16:creationId xmlns:a16="http://schemas.microsoft.com/office/drawing/2014/main" id="{577BE0BF-EDC5-C813-1927-5E46A592EB39}"/>
+                  </a:ext>
+                </a:extLst>
+              </p:cNvPr>
+              <p:cNvSpPr/>
+              <p:nvPr/>
+            </p:nvSpPr>
+            <p:spPr>
+              <a:xfrm>
+                <a:off x="5504131" y="4481433"/>
+                <a:ext cx="205539" cy="190500"/>
+              </a:xfrm>
+              <a:prstGeom prst="ellipse">
+                <a:avLst/>
+              </a:prstGeom>
+              <a:solidFill>
+                <a:schemeClr val="accent5"/>
+              </a:solidFill>
+              <a:ln>
+                <a:solidFill>
+                  <a:schemeClr val="tx1">
+                    <a:lumMod val="50000"/>
+                    <a:lumOff val="50000"/>
+                  </a:schemeClr>
+                </a:solidFill>
+              </a:ln>
+            </p:spPr>
+            <p:style>
+              <a:lnRef idx="0">
+                <a:scrgbClr r="0" g="0" b="0"/>
+              </a:lnRef>
+              <a:fillRef idx="0">
+                <a:scrgbClr r="0" g="0" b="0"/>
+              </a:fillRef>
+              <a:effectRef idx="0">
+                <a:scrgbClr r="0" g="0" b="0"/>
+              </a:effectRef>
+              <a:fontRef idx="minor">
+                <a:schemeClr val="lt1"/>
+              </a:fontRef>
+            </p:style>
+            <p:txBody>
+              <a:bodyPr rtlCol="0" anchor="ctr"/>
+              <a:lstStyle/>
+              <a:p>
+                <a:pPr algn="ctr"/>
+                <a:endParaRPr lang="en-US"/>
+              </a:p>
+            </p:txBody>
+          </p:sp>
+          <p:sp>
+            <p:nvSpPr>
+              <p:cNvPr id="174" name="TextBox 173">
+                <a:extLst>
+                  <a:ext uri="{FF2B5EF4-FFF2-40B4-BE49-F238E27FC236}">
+                    <a16:creationId xmlns:a16="http://schemas.microsoft.com/office/drawing/2014/main" id="{95848EB2-1CD3-72B8-C27A-E5AB5CCAC284}"/>
+                  </a:ext>
+                </a:extLst>
+              </p:cNvPr>
+              <p:cNvSpPr txBox="1"/>
+              <p:nvPr/>
+            </p:nvSpPr>
+            <p:spPr>
+              <a:xfrm rot="5400000">
+                <a:off x="5542027" y="4700333"/>
+                <a:ext cx="130384" cy="309327"/>
+              </a:xfrm>
+              <a:prstGeom prst="rect">
+                <a:avLst/>
+              </a:prstGeom>
+              <a:noFill/>
+            </p:spPr>
+            <p:txBody>
+              <a:bodyPr wrap="square" rtlCol="0">
+                <a:spAutoFit/>
+              </a:bodyPr>
+              <a:lstStyle/>
+              <a:p>
+                <a:pPr algn="ctr"/>
+                <a:r>
+                  <a:rPr lang="en-US" sz="9600" dirty="0">
+                    <a:solidFill>
+                      <a:schemeClr val="bg1">
+                        <a:lumMod val="95000"/>
+                      </a:schemeClr>
+                    </a:solidFill>
+                  </a:rPr>
+                  <a:t>†</a:t>
+                </a:r>
+              </a:p>
+            </p:txBody>
+          </p:sp>
+        </p:grpSp>
+        <p:cxnSp>
+          <p:nvCxnSpPr>
+            <p:cNvPr id="179" name="Straight Arrow Connector 178">
+              <a:extLst>
+                <a:ext uri="{FF2B5EF4-FFF2-40B4-BE49-F238E27FC236}">
+                  <a16:creationId xmlns:a16="http://schemas.microsoft.com/office/drawing/2014/main" id="{A448C2E4-942B-47BB-887A-0EAD6ED42595}"/>
+                </a:ext>
+              </a:extLst>
+            </p:cNvPr>
+            <p:cNvCxnSpPr>
+              <a:cxnSpLocks/>
+            </p:cNvCxnSpPr>
+            <p:nvPr/>
+          </p:nvCxnSpPr>
+          <p:spPr>
+            <a:xfrm rot="16200000">
+              <a:off x="29571754" y="2813247"/>
+              <a:ext cx="1399209" cy="2173516"/>
+            </a:xfrm>
+            <a:prstGeom prst="straightConnector1">
+              <a:avLst/>
+            </a:prstGeom>
+            <a:ln w="76200">
+              <a:solidFill>
+                <a:schemeClr val="bg1">
+                  <a:lumMod val="95000"/>
+                </a:schemeClr>
+              </a:solidFill>
+              <a:tailEnd type="triangle"/>
+            </a:ln>
+          </p:spPr>
+          <p:style>
+            <a:lnRef idx="1">
+              <a:schemeClr val="dk1"/>
+            </a:lnRef>
+            <a:fillRef idx="0">
+              <a:schemeClr val="dk1"/>
+            </a:fillRef>
+            <a:effectRef idx="0">
+              <a:schemeClr val="dk1"/>
+            </a:effectRef>
+            <a:fontRef idx="minor">
+              <a:schemeClr val="tx1"/>
+            </a:fontRef>
+          </p:style>
+        </p:cxnSp>
+        <p:cxnSp>
+          <p:nvCxnSpPr>
+            <p:cNvPr id="180" name="Straight Arrow Connector 179">
+              <a:extLst>
+                <a:ext uri="{FF2B5EF4-FFF2-40B4-BE49-F238E27FC236}">
+                  <a16:creationId xmlns:a16="http://schemas.microsoft.com/office/drawing/2014/main" id="{DD8D4661-49F8-FC33-8FA8-D01A2093E10E}"/>
+                </a:ext>
+              </a:extLst>
+            </p:cNvPr>
+            <p:cNvCxnSpPr>
+              <a:cxnSpLocks/>
+            </p:cNvCxnSpPr>
+            <p:nvPr/>
+          </p:nvCxnSpPr>
+          <p:spPr>
+            <a:xfrm rot="16200000" flipH="1">
+              <a:off x="29604031" y="5083505"/>
+              <a:ext cx="1399209" cy="2173516"/>
+            </a:xfrm>
+            <a:prstGeom prst="straightConnector1">
+              <a:avLst/>
+            </a:prstGeom>
+            <a:ln w="76200">
+              <a:solidFill>
+                <a:schemeClr val="bg1">
+                  <a:lumMod val="95000"/>
+                </a:schemeClr>
+              </a:solidFill>
+              <a:tailEnd type="triangle"/>
+            </a:ln>
+          </p:spPr>
+          <p:style>
+            <a:lnRef idx="1">
+              <a:schemeClr val="dk1"/>
+            </a:lnRef>
+            <a:fillRef idx="0">
+              <a:schemeClr val="dk1"/>
+            </a:fillRef>
+            <a:effectRef idx="0">
+              <a:schemeClr val="dk1"/>
+            </a:effectRef>
+            <a:fontRef idx="minor">
+              <a:schemeClr val="tx1"/>
+            </a:fontRef>
+          </p:style>
+        </p:cxnSp>
+        <p:sp>
+          <p:nvSpPr>
+            <p:cNvPr id="207" name="Oval 206">
+              <a:extLst>
+                <a:ext uri="{FF2B5EF4-FFF2-40B4-BE49-F238E27FC236}">
+                  <a16:creationId xmlns:a16="http://schemas.microsoft.com/office/drawing/2014/main" id="{3120EAA2-D2FC-48FA-EA3D-C8DC29C62684}"/>
+                </a:ext>
+              </a:extLst>
+            </p:cNvPr>
+            <p:cNvSpPr/>
+            <p:nvPr/>
+          </p:nvSpPr>
+          <p:spPr>
+            <a:xfrm rot="16200000">
+              <a:off x="31455048" y="2439658"/>
+              <a:ext cx="1042994" cy="935689"/>
+            </a:xfrm>
+            <a:prstGeom prst="ellipse">
+              <a:avLst/>
+            </a:prstGeom>
+            <a:solidFill>
+              <a:schemeClr val="accent6"/>
+            </a:solidFill>
+            <a:ln>
+              <a:solidFill>
+                <a:schemeClr val="tx1">
+                  <a:lumMod val="50000"/>
+                  <a:lumOff val="50000"/>
+                </a:schemeClr>
+              </a:solidFill>
+            </a:ln>
+          </p:spPr>
+          <p:style>
+            <a:lnRef idx="0">
+              <a:scrgbClr r="0" g="0" b="0"/>
+            </a:lnRef>
+            <a:fillRef idx="0">
+              <a:scrgbClr r="0" g="0" b="0"/>
+            </a:fillRef>
+            <a:effectRef idx="0">
+              <a:scrgbClr r="0" g="0" b="0"/>
+            </a:effectRef>
+            <a:fontRef idx="minor">
+              <a:schemeClr val="lt1"/>
+            </a:fontRef>
+          </p:style>
+          <p:txBody>
+            <a:bodyPr rtlCol="0" anchor="ctr"/>
+            <a:lstStyle/>
+            <a:p>
+              <a:pPr algn="ctr"/>
+              <a:endParaRPr lang="en-US"/>
+            </a:p>
+          </p:txBody>
+        </p:sp>
+        <p:sp>
+          <p:nvSpPr>
+            <p:cNvPr id="208" name="Oval 207">
+              <a:extLst>
+                <a:ext uri="{FF2B5EF4-FFF2-40B4-BE49-F238E27FC236}">
+                  <a16:creationId xmlns:a16="http://schemas.microsoft.com/office/drawing/2014/main" id="{8B7C5034-6304-1E13-B197-590C12D47DBD}"/>
+                </a:ext>
+              </a:extLst>
+            </p:cNvPr>
+            <p:cNvSpPr/>
+            <p:nvPr/>
+          </p:nvSpPr>
+          <p:spPr>
+            <a:xfrm rot="16200000">
+              <a:off x="31455048" y="6524738"/>
+              <a:ext cx="1042994" cy="935689"/>
+            </a:xfrm>
+            <a:prstGeom prst="ellipse">
+              <a:avLst/>
+            </a:prstGeom>
+            <a:solidFill>
+              <a:schemeClr val="accent6"/>
+            </a:solidFill>
+            <a:ln>
+              <a:solidFill>
+                <a:schemeClr val="tx1">
+                  <a:lumMod val="50000"/>
+                  <a:lumOff val="50000"/>
+                </a:schemeClr>
+              </a:solidFill>
+            </a:ln>
+          </p:spPr>
+          <p:style>
+            <a:lnRef idx="0">
+              <a:scrgbClr r="0" g="0" b="0"/>
+            </a:lnRef>
+            <a:fillRef idx="0">
+              <a:scrgbClr r="0" g="0" b="0"/>
+            </a:fillRef>
+            <a:effectRef idx="0">
+              <a:scrgbClr r="0" g="0" b="0"/>
+            </a:effectRef>
+            <a:fontRef idx="minor">
+              <a:schemeClr val="lt1"/>
+            </a:fontRef>
+          </p:style>
+          <p:txBody>
+            <a:bodyPr rtlCol="0" anchor="ctr"/>
+            <a:lstStyle/>
+            <a:p>
+              <a:pPr algn="ctr"/>
+              <a:endParaRPr lang="en-US"/>
+            </a:p>
+          </p:txBody>
+        </p:sp>
+      </p:grpSp>
+      <p:sp>
+        <p:nvSpPr>
+          <p:cNvPr id="210" name="Freeform 11">
+            <a:extLst>
+              <a:ext uri="{FF2B5EF4-FFF2-40B4-BE49-F238E27FC236}">
+                <a16:creationId xmlns:a16="http://schemas.microsoft.com/office/drawing/2014/main" id="{3D367B89-CF15-CAFA-BF85-12A5AC795766}"/>
+              </a:ext>
+            </a:extLst>
+          </p:cNvPr>
+          <p:cNvSpPr/>
+          <p:nvPr/>
+        </p:nvSpPr>
+        <p:spPr>
+          <a:xfrm>
+            <a:off x="326070" y="39769211"/>
+            <a:ext cx="32262128" cy="3962817"/>
+          </a:xfrm>
+          <a:custGeom>
+            <a:avLst/>
+            <a:gdLst/>
+            <a:ahLst/>
+            <a:cxnLst/>
+            <a:rect l="l" t="t" r="r" b="b"/>
+            <a:pathLst>
+              <a:path w="14643608" h="1615821">
+                <a:moveTo>
+                  <a:pt x="0" y="0"/>
+                </a:moveTo>
+                <a:lnTo>
+                  <a:pt x="14643608" y="0"/>
+                </a:lnTo>
+                <a:lnTo>
+                  <a:pt x="14643608" y="1615821"/>
+                </a:lnTo>
+                <a:lnTo>
+                  <a:pt x="0" y="1615821"/>
+                </a:lnTo>
+                <a:close/>
+              </a:path>
+            </a:pathLst>
+          </a:custGeom>
+          <a:solidFill>
+            <a:srgbClr val="002060"/>
+          </a:solidFill>
+        </p:spPr>
+        <p:txBody>
+          <a:bodyPr/>
+          <a:lstStyle/>
+          <a:p>
+            <a:endParaRPr lang="en-US" sz="1350" dirty="0"/>
+          </a:p>
+        </p:txBody>
+      </p:sp>
+      <p:sp>
+        <p:nvSpPr>
+          <p:cNvPr id="230" name="TextBox 229">
+            <a:extLst>
+              <a:ext uri="{FF2B5EF4-FFF2-40B4-BE49-F238E27FC236}">
+                <a16:creationId xmlns:a16="http://schemas.microsoft.com/office/drawing/2014/main" id="{9A6FD25B-B43C-3BCB-479A-647D6508E7A6}"/>
+              </a:ext>
+            </a:extLst>
+          </p:cNvPr>
+          <p:cNvSpPr txBox="1"/>
+          <p:nvPr/>
+        </p:nvSpPr>
+        <p:spPr>
+          <a:xfrm>
+            <a:off x="1144577" y="40512977"/>
+            <a:ext cx="30974953" cy="2308324"/>
+          </a:xfrm>
+          <a:prstGeom prst="rect">
+            <a:avLst/>
+          </a:prstGeom>
+          <a:noFill/>
+        </p:spPr>
+        <p:txBody>
+          <a:bodyPr wrap="square" rtlCol="0">
+            <a:spAutoFit/>
+          </a:bodyPr>
+          <a:lstStyle/>
+          <a:p>
+            <a:pPr algn="ctr"/>
+            <a:r>
+              <a:rPr lang="en-US" sz="7200" b="1" dirty="0">
+                <a:solidFill>
+                  <a:schemeClr val="bg1"/>
+                </a:solidFill>
+              </a:rPr>
+              <a:t>Preventing </a:t>
+            </a:r>
+            <a:r>
+              <a:rPr lang="en-US" sz="7200" dirty="0">
+                <a:solidFill>
+                  <a:schemeClr val="bg1"/>
+                </a:solidFill>
+              </a:rPr>
+              <a:t>the emergence of zoonotic disease requires </a:t>
+            </a:r>
+            <a:r>
+              <a:rPr lang="en-US" sz="7200" b="1" dirty="0">
+                <a:solidFill>
+                  <a:schemeClr val="bg1"/>
+                </a:solidFill>
+              </a:rPr>
+              <a:t>significantly less vaccination </a:t>
+            </a:r>
+            <a:r>
+              <a:rPr lang="en-US" sz="7200" dirty="0">
+                <a:solidFill>
+                  <a:schemeClr val="bg1"/>
+                </a:solidFill>
+              </a:rPr>
+              <a:t>than eradicating once endemic</a:t>
+            </a:r>
+            <a:r>
+              <a:rPr lang="en-US" sz="7200" b="1" dirty="0">
+                <a:solidFill>
+                  <a:schemeClr val="bg1"/>
+                </a:solidFill>
+              </a:rPr>
+              <a:t>. </a:t>
+            </a:r>
+          </a:p>
+        </p:txBody>
+      </p:sp>
+      <p:sp>
+        <p:nvSpPr>
+          <p:cNvPr id="232" name="TextBox 231">
+            <a:extLst>
+              <a:ext uri="{FF2B5EF4-FFF2-40B4-BE49-F238E27FC236}">
+                <a16:creationId xmlns:a16="http://schemas.microsoft.com/office/drawing/2014/main" id="{98041906-8CB5-8FB9-5436-9AB2C30CE94B}"/>
+              </a:ext>
+            </a:extLst>
+          </p:cNvPr>
+          <p:cNvSpPr txBox="1"/>
+          <p:nvPr/>
+        </p:nvSpPr>
+        <p:spPr>
+          <a:xfrm>
+            <a:off x="98183" y="6852294"/>
+            <a:ext cx="15598181" cy="2554545"/>
+          </a:xfrm>
+          <a:prstGeom prst="rect">
+            <a:avLst/>
+          </a:prstGeom>
+          <a:noFill/>
+        </p:spPr>
+        <p:txBody>
+          <a:bodyPr wrap="square" rtlCol="0">
+            <a:spAutoFit/>
+          </a:bodyPr>
+          <a:lstStyle/>
+          <a:p>
+            <a:r>
+              <a:rPr lang="en-US" sz="4800" dirty="0"/>
+              <a:t>Cora Hirst</a:t>
+            </a:r>
+            <a:r>
+              <a:rPr lang="en-US" sz="4800" baseline="30000" dirty="0"/>
+              <a:t>1</a:t>
+            </a:r>
+            <a:r>
+              <a:rPr lang="en-US" sz="4800" dirty="0"/>
+              <a:t>, Julia Deichmann</a:t>
+            </a:r>
+            <a:r>
+              <a:rPr lang="en-US" sz="4800" baseline="30000" dirty="0"/>
+              <a:t>2</a:t>
+            </a:r>
+            <a:r>
+              <a:rPr lang="en-US" sz="4800" dirty="0"/>
+              <a:t>, Rustom Antia</a:t>
+            </a:r>
+            <a:r>
+              <a:rPr lang="en-US" sz="4800" baseline="30000" dirty="0"/>
+              <a:t>1</a:t>
+            </a:r>
+          </a:p>
+          <a:p>
+            <a:endParaRPr lang="en-US" sz="4800" baseline="30000" dirty="0">
+              <a:solidFill>
+                <a:schemeClr val="tx2"/>
+              </a:solidFill>
+            </a:endParaRPr>
+          </a:p>
+          <a:p>
+            <a:r>
+              <a:rPr lang="en-US" sz="4800" baseline="30000" dirty="0">
+                <a:solidFill>
+                  <a:schemeClr val="tx2"/>
+                </a:solidFill>
+              </a:rPr>
+              <a:t>(1) Emory University Department of Biology (2) Harvard T. Chan School of Public Health</a:t>
+            </a:r>
+          </a:p>
+          <a:p>
+            <a:endParaRPr lang="en-US" sz="4800" dirty="0"/>
+          </a:p>
+        </p:txBody>
+      </p:sp>
+      <p:sp>
+        <p:nvSpPr>
+          <p:cNvPr id="2" name="TextBox 1">
+            <a:extLst>
+              <a:ext uri="{FF2B5EF4-FFF2-40B4-BE49-F238E27FC236}">
+                <a16:creationId xmlns:a16="http://schemas.microsoft.com/office/drawing/2014/main" id="{E1735991-012E-B8DA-0E0C-E675B642EFF9}"/>
+              </a:ext>
+            </a:extLst>
+          </p:cNvPr>
+          <p:cNvSpPr txBox="1"/>
+          <p:nvPr/>
+        </p:nvSpPr>
+        <p:spPr>
+          <a:xfrm>
+            <a:off x="3276600" y="26416860"/>
+            <a:ext cx="11695634" cy="707886"/>
+          </a:xfrm>
+          <a:prstGeom prst="rect">
+            <a:avLst/>
+          </a:prstGeom>
+          <a:noFill/>
+        </p:spPr>
+        <p:txBody>
+          <a:bodyPr wrap="square" rtlCol="0">
+            <a:spAutoFit/>
+          </a:bodyPr>
+          <a:lstStyle/>
+          <a:p>
+            <a:pPr algn="r"/>
+            <a:r>
+              <a:rPr lang="en-US" sz="4000" dirty="0"/>
+              <a:t> </a:t>
+            </a:r>
+          </a:p>
+        </p:txBody>
+      </p:sp>
+      <p:sp>
+        <p:nvSpPr>
+          <p:cNvPr id="4" name="TextBox 3">
+            <a:extLst>
+              <a:ext uri="{FF2B5EF4-FFF2-40B4-BE49-F238E27FC236}">
+                <a16:creationId xmlns:a16="http://schemas.microsoft.com/office/drawing/2014/main" id="{40786D63-CB13-0F10-C36D-119E659CBCE6}"/>
+              </a:ext>
+            </a:extLst>
+          </p:cNvPr>
+          <p:cNvSpPr txBox="1"/>
+          <p:nvPr/>
+        </p:nvSpPr>
+        <p:spPr>
+          <a:xfrm>
+            <a:off x="267403" y="9525000"/>
+            <a:ext cx="18633022" cy="1032459"/>
+          </a:xfrm>
+          <a:prstGeom prst="rect">
+            <a:avLst/>
+          </a:prstGeom>
+          <a:ln w="76200">
+            <a:solidFill>
+              <a:srgbClr val="002060"/>
+            </a:solidFill>
+          </a:ln>
+        </p:spPr>
+        <p:style>
+          <a:lnRef idx="2">
+            <a:schemeClr val="accent1"/>
+          </a:lnRef>
+          <a:fillRef idx="1">
+            <a:schemeClr val="lt1"/>
+          </a:fillRef>
+          <a:effectRef idx="0">
+            <a:schemeClr val="accent1"/>
+          </a:effectRef>
+          <a:fontRef idx="minor">
+            <a:schemeClr val="dk1"/>
+          </a:fontRef>
+        </p:style>
+        <p:txBody>
+          <a:bodyPr wrap="square" rtlCol="0">
+            <a:spAutoFit/>
+          </a:bodyPr>
+          <a:lstStyle/>
+          <a:p>
+            <a:pPr algn="ctr"/>
+            <a:r>
+              <a:rPr lang="en-US" sz="6000" b="1" dirty="0">
+                <a:solidFill>
+                  <a:srgbClr val="002060"/>
+                </a:solidFill>
+              </a:rPr>
+              <a:t>Motivation</a:t>
+            </a:r>
+          </a:p>
+        </p:txBody>
+      </p:sp>
+      <p:sp>
+        <p:nvSpPr>
+          <p:cNvPr id="6" name="TextBox 5">
+            <a:extLst>
+              <a:ext uri="{FF2B5EF4-FFF2-40B4-BE49-F238E27FC236}">
+                <a16:creationId xmlns:a16="http://schemas.microsoft.com/office/drawing/2014/main" id="{B58A50B8-26EB-A4CF-BFAA-8CFBA977993E}"/>
+              </a:ext>
+            </a:extLst>
+          </p:cNvPr>
+          <p:cNvSpPr txBox="1"/>
+          <p:nvPr/>
+        </p:nvSpPr>
+        <p:spPr>
+          <a:xfrm>
+            <a:off x="277143" y="10775961"/>
+            <a:ext cx="18809042" cy="1323439"/>
+          </a:xfrm>
+          <a:prstGeom prst="rect">
+            <a:avLst/>
+          </a:prstGeom>
+          <a:noFill/>
+        </p:spPr>
+        <p:txBody>
+          <a:bodyPr wrap="square" rtlCol="0">
+            <a:spAutoFit/>
+          </a:bodyPr>
+          <a:lstStyle/>
+          <a:p>
+            <a:r>
+              <a:rPr lang="en-US" sz="4000" b="1" dirty="0"/>
+              <a:t>Decaying cross-protective immunity at the population level </a:t>
+            </a:r>
+            <a:r>
+              <a:rPr lang="en-US" sz="4000" dirty="0"/>
+              <a:t>increases the evolutionary potential of zoonotic pathogens related to eradicated pathogens.</a:t>
+            </a:r>
+            <a:endParaRPr lang="en-US" sz="4000" b="1" dirty="0"/>
+          </a:p>
+        </p:txBody>
+      </p:sp>
+      <p:pic>
+        <p:nvPicPr>
+          <p:cNvPr id="8" name="Picture 7" descr="A graph of different colored lines&#10;&#10;AI-generated content may be incorrect.">
+            <a:extLst>
+              <a:ext uri="{FF2B5EF4-FFF2-40B4-BE49-F238E27FC236}">
+                <a16:creationId xmlns:a16="http://schemas.microsoft.com/office/drawing/2014/main" id="{FC64D3AC-2206-F284-D703-29386E039144}"/>
+              </a:ext>
+            </a:extLst>
+          </p:cNvPr>
+          <p:cNvPicPr>
+            <a:picLocks noChangeAspect="1"/>
+          </p:cNvPicPr>
+          <p:nvPr/>
+        </p:nvPicPr>
+        <p:blipFill>
+          <a:blip r:embed="rId2">
+            <a:extLst>
+              <a:ext uri="{28A0092B-C50C-407E-A947-70E740481C1C}">
+                <a14:useLocalDpi xmlns:a14="http://schemas.microsoft.com/office/drawing/2010/main" val="0"/>
+              </a:ext>
+            </a:extLst>
+          </a:blip>
+          <a:srcRect r="1921"/>
+          <a:stretch/>
+        </p:blipFill>
+        <p:spPr>
+          <a:xfrm>
+            <a:off x="277143" y="12347436"/>
+            <a:ext cx="10185279" cy="6636137"/>
+          </a:xfrm>
+          <a:prstGeom prst="rect">
+            <a:avLst/>
+          </a:prstGeom>
+        </p:spPr>
+      </p:pic>
+      <p:sp>
+        <p:nvSpPr>
+          <p:cNvPr id="11" name="TextBox 10">
+            <a:extLst>
+              <a:ext uri="{FF2B5EF4-FFF2-40B4-BE49-F238E27FC236}">
+                <a16:creationId xmlns:a16="http://schemas.microsoft.com/office/drawing/2014/main" id="{B501F6DD-D2F0-6A99-A2D4-0DE7B16A09E2}"/>
+              </a:ext>
+            </a:extLst>
+          </p:cNvPr>
+          <p:cNvSpPr txBox="1"/>
+          <p:nvPr/>
+        </p:nvSpPr>
+        <p:spPr>
+          <a:xfrm>
+            <a:off x="9491999" y="12391051"/>
+            <a:ext cx="9442219" cy="7478970"/>
+          </a:xfrm>
+          <a:prstGeom prst="rect">
+            <a:avLst/>
+          </a:prstGeom>
+          <a:noFill/>
+        </p:spPr>
+        <p:txBody>
+          <a:bodyPr wrap="square" rtlCol="0">
+            <a:spAutoFit/>
+          </a:bodyPr>
+          <a:lstStyle/>
+          <a:p>
+            <a:pPr algn="r"/>
+            <a:r>
+              <a:rPr lang="en-US" sz="4000" b="1" dirty="0"/>
+              <a:t>Zoonotic disease transmission after spillover becomes more likely </a:t>
+            </a:r>
+            <a:r>
+              <a:rPr lang="en-US" sz="4000" dirty="0"/>
+              <a:t>as cross-protection to eradicated relative decays </a:t>
+            </a:r>
+          </a:p>
+          <a:p>
+            <a:pPr algn="r"/>
+            <a:r>
+              <a:rPr lang="en-US" sz="4000" dirty="0"/>
+              <a:t>at the population level. </a:t>
+            </a:r>
+          </a:p>
+          <a:p>
+            <a:pPr algn="r"/>
+            <a:endParaRPr lang="en-US" sz="2800" dirty="0"/>
+          </a:p>
+          <a:p>
+            <a:pPr algn="r"/>
+            <a:r>
+              <a:rPr lang="en-US" sz="4000" dirty="0"/>
+              <a:t>Even if the number of secondary cases expected from a single case is less than 1 </a:t>
+            </a:r>
+          </a:p>
+          <a:p>
+            <a:pPr algn="r"/>
+            <a:r>
+              <a:rPr lang="en-US" sz="4000" dirty="0"/>
+              <a:t>(R &lt; 1) , </a:t>
+            </a:r>
+            <a:r>
+              <a:rPr lang="en-US" sz="4000" b="1" dirty="0"/>
+              <a:t>mutations accumulated during stochastic chains of transmission</a:t>
+            </a:r>
+            <a:r>
+              <a:rPr lang="en-US" sz="4000" dirty="0"/>
+              <a:t> after spillover may facilitate emergence of a supercritical (R &gt; 1) variant with sustained human-human transmission. </a:t>
+            </a:r>
+          </a:p>
+        </p:txBody>
+      </p:sp>
+      <p:pic>
+        <p:nvPicPr>
+          <p:cNvPr id="13" name="Picture 12" descr="A diagram of a sequence of steps&#10;&#10;AI-generated content may be incorrect.">
+            <a:extLst>
+              <a:ext uri="{FF2B5EF4-FFF2-40B4-BE49-F238E27FC236}">
+                <a16:creationId xmlns:a16="http://schemas.microsoft.com/office/drawing/2014/main" id="{E138D18D-7D80-AFBE-489A-BFA58A821054}"/>
+              </a:ext>
+            </a:extLst>
+          </p:cNvPr>
+          <p:cNvPicPr>
+            <a:picLocks noChangeAspect="1"/>
+          </p:cNvPicPr>
+          <p:nvPr/>
+        </p:nvPicPr>
+        <p:blipFill>
+          <a:blip r:embed="rId3">
+            <a:extLst>
+              <a:ext uri="{28A0092B-C50C-407E-A947-70E740481C1C}">
+                <a14:useLocalDpi xmlns:a14="http://schemas.microsoft.com/office/drawing/2010/main" val="0"/>
+              </a:ext>
+            </a:extLst>
+          </a:blip>
+          <a:stretch>
+            <a:fillRect/>
+          </a:stretch>
+        </p:blipFill>
+        <p:spPr>
+          <a:xfrm>
+            <a:off x="9220200" y="19964400"/>
+            <a:ext cx="9980962" cy="6247863"/>
+          </a:xfrm>
+          <a:prstGeom prst="rect">
+            <a:avLst/>
+          </a:prstGeom>
+        </p:spPr>
+      </p:pic>
+      <p:sp>
+        <p:nvSpPr>
+          <p:cNvPr id="14" name="TextBox 13">
+            <a:extLst>
+              <a:ext uri="{FF2B5EF4-FFF2-40B4-BE49-F238E27FC236}">
+                <a16:creationId xmlns:a16="http://schemas.microsoft.com/office/drawing/2014/main" id="{94786680-1328-C5FB-9AB0-39566DE582B1}"/>
+              </a:ext>
+            </a:extLst>
+          </p:cNvPr>
+          <p:cNvSpPr txBox="1"/>
+          <p:nvPr/>
+        </p:nvSpPr>
+        <p:spPr>
+          <a:xfrm>
+            <a:off x="324639" y="19507736"/>
+            <a:ext cx="9023037" cy="6247864"/>
+          </a:xfrm>
+          <a:prstGeom prst="rect">
+            <a:avLst/>
+          </a:prstGeom>
+          <a:noFill/>
+        </p:spPr>
+        <p:txBody>
+          <a:bodyPr wrap="square">
+            <a:spAutoFit/>
+          </a:bodyPr>
+          <a:lstStyle/>
+          <a:p>
+            <a:r>
+              <a:rPr lang="en-US" sz="4000" dirty="0"/>
+              <a:t>Cross-immunity arising from either natural infection or vaccine-induced immunity to Smallpox largely prevented zoonotic spillovers and human-human transmission of Mpox. Since the eradication of Smallpox in 1980</a:t>
+            </a:r>
+            <a:r>
+              <a:rPr lang="en-US" sz="4000" b="1" dirty="0"/>
+              <a:t>, the dilution of the population with this cross-immunity over time </a:t>
+            </a:r>
+            <a:r>
+              <a:rPr lang="en-US" sz="4000" dirty="0"/>
+              <a:t>has led to an increase in both the number of zoonotic cases and the transmission of Mpox in humans. </a:t>
+            </a:r>
+          </a:p>
+        </p:txBody>
+      </p:sp>
+      <p:sp>
+        <p:nvSpPr>
+          <p:cNvPr id="15" name="TextBox 14">
+            <a:extLst>
+              <a:ext uri="{FF2B5EF4-FFF2-40B4-BE49-F238E27FC236}">
+                <a16:creationId xmlns:a16="http://schemas.microsoft.com/office/drawing/2014/main" id="{F2891AE6-C7AA-47BE-AC33-6CFD55743DC5}"/>
+              </a:ext>
+            </a:extLst>
+          </p:cNvPr>
+          <p:cNvSpPr txBox="1"/>
+          <p:nvPr/>
+        </p:nvSpPr>
+        <p:spPr>
+          <a:xfrm>
+            <a:off x="277142" y="26300761"/>
+            <a:ext cx="18657075" cy="1323439"/>
+          </a:xfrm>
+          <a:prstGeom prst="rect">
+            <a:avLst/>
+          </a:prstGeom>
+          <a:noFill/>
+        </p:spPr>
+        <p:txBody>
+          <a:bodyPr wrap="square">
+            <a:spAutoFit/>
+          </a:bodyPr>
+          <a:lstStyle/>
+          <a:p>
+            <a:r>
+              <a:rPr lang="en-US" sz="4000" dirty="0"/>
+              <a:t>As a consequence, the </a:t>
+            </a:r>
+            <a:r>
+              <a:rPr lang="en-US" sz="4000" b="1" dirty="0"/>
+              <a:t>threat of emergence of Mpox as a highly transmissible human pathogen is increasing. </a:t>
+            </a:r>
+          </a:p>
+        </p:txBody>
+      </p:sp>
+      <p:sp>
+        <p:nvSpPr>
+          <p:cNvPr id="16" name="TextBox 15">
+            <a:extLst>
+              <a:ext uri="{FF2B5EF4-FFF2-40B4-BE49-F238E27FC236}">
+                <a16:creationId xmlns:a16="http://schemas.microsoft.com/office/drawing/2014/main" id="{FBBD5BD8-D2D4-F7EA-5988-B8B761CE65E9}"/>
+              </a:ext>
+            </a:extLst>
+          </p:cNvPr>
+          <p:cNvSpPr txBox="1"/>
+          <p:nvPr/>
+        </p:nvSpPr>
+        <p:spPr>
+          <a:xfrm>
+            <a:off x="267403" y="28052224"/>
+            <a:ext cx="18633022" cy="1032459"/>
+          </a:xfrm>
+          <a:prstGeom prst="rect">
+            <a:avLst/>
+          </a:prstGeom>
+          <a:ln w="76200">
+            <a:solidFill>
+              <a:srgbClr val="002060"/>
+            </a:solidFill>
+          </a:ln>
+        </p:spPr>
+        <p:style>
+          <a:lnRef idx="2">
+            <a:schemeClr val="accent1"/>
+          </a:lnRef>
+          <a:fillRef idx="1">
+            <a:schemeClr val="lt1"/>
+          </a:fillRef>
+          <a:effectRef idx="0">
+            <a:schemeClr val="accent1"/>
+          </a:effectRef>
+          <a:fontRef idx="minor">
+            <a:schemeClr val="dk1"/>
+          </a:fontRef>
+        </p:style>
+        <p:txBody>
+          <a:bodyPr wrap="square" rtlCol="0">
+            <a:spAutoFit/>
+          </a:bodyPr>
+          <a:lstStyle/>
+          <a:p>
+            <a:pPr algn="ctr"/>
+            <a:r>
+              <a:rPr lang="en-US" sz="6000" b="1" dirty="0">
+                <a:solidFill>
+                  <a:srgbClr val="002060"/>
+                </a:solidFill>
+              </a:rPr>
+              <a:t>Take Aways</a:t>
+            </a:r>
+          </a:p>
+        </p:txBody>
+      </p:sp>
+      <p:pic>
+        <p:nvPicPr>
+          <p:cNvPr id="17" name="Picture 16" descr="A diagram of a curve&#10;&#10;AI-generated content may be incorrect.">
+            <a:extLst>
+              <a:ext uri="{FF2B5EF4-FFF2-40B4-BE49-F238E27FC236}">
+                <a16:creationId xmlns:a16="http://schemas.microsoft.com/office/drawing/2014/main" id="{BD00176A-6A94-C781-07A6-9030E5F35C6C}"/>
+              </a:ext>
+            </a:extLst>
+          </p:cNvPr>
+          <p:cNvPicPr>
+            <a:picLocks noChangeAspect="1"/>
+          </p:cNvPicPr>
+          <p:nvPr/>
+        </p:nvPicPr>
+        <p:blipFill>
+          <a:blip r:embed="rId4">
+            <a:extLst>
+              <a:ext uri="{28A0092B-C50C-407E-A947-70E740481C1C}">
+                <a14:useLocalDpi xmlns:a14="http://schemas.microsoft.com/office/drawing/2010/main" val="0"/>
+              </a:ext>
+            </a:extLst>
+          </a:blip>
+          <a:stretch>
+            <a:fillRect/>
+          </a:stretch>
+        </p:blipFill>
+        <p:spPr>
+          <a:xfrm>
+            <a:off x="6695836" y="34623388"/>
+            <a:ext cx="12204589" cy="4903595"/>
+          </a:xfrm>
+          <a:prstGeom prst="rect">
+            <a:avLst/>
+          </a:prstGeom>
+        </p:spPr>
+      </p:pic>
+      <p:sp>
+        <p:nvSpPr>
+          <p:cNvPr id="18" name="TextBox 17">
+            <a:extLst>
+              <a:ext uri="{FF2B5EF4-FFF2-40B4-BE49-F238E27FC236}">
+                <a16:creationId xmlns:a16="http://schemas.microsoft.com/office/drawing/2014/main" id="{B3F9C3C5-3DC6-169A-6DFE-CBF9FB9600C0}"/>
+              </a:ext>
+            </a:extLst>
+          </p:cNvPr>
+          <p:cNvSpPr txBox="1"/>
+          <p:nvPr/>
+        </p:nvSpPr>
+        <p:spPr>
+          <a:xfrm>
+            <a:off x="277142" y="29364403"/>
+            <a:ext cx="18369626" cy="5016758"/>
+          </a:xfrm>
+          <a:prstGeom prst="rect">
+            <a:avLst/>
+          </a:prstGeom>
+          <a:noFill/>
+        </p:spPr>
+        <p:txBody>
+          <a:bodyPr wrap="square">
+            <a:spAutoFit/>
+          </a:bodyPr>
+          <a:lstStyle/>
+          <a:p>
+            <a:r>
+              <a:rPr lang="en-US" sz="4000" dirty="0"/>
+              <a:t>We explored </a:t>
+            </a:r>
+            <a:r>
+              <a:rPr lang="en-US" sz="4000" b="1" dirty="0"/>
+              <a:t>the effect of vaccination on preventing the adaptive evolution of zoonotic disease </a:t>
+            </a:r>
+            <a:r>
+              <a:rPr lang="en-US" sz="4000" dirty="0"/>
+              <a:t>toward sustained human-human transmission. </a:t>
+            </a:r>
+          </a:p>
+          <a:p>
+            <a:endParaRPr lang="en-US" sz="4000" dirty="0"/>
+          </a:p>
+          <a:p>
+            <a:r>
+              <a:rPr lang="en-US" sz="4000" dirty="0"/>
+              <a:t>We identified a threshold effective reproductive number , R_T, above which the evolution of a subcritical variant to supercriticality is highly likely. </a:t>
+            </a:r>
+          </a:p>
+          <a:p>
+            <a:endParaRPr lang="en-US" sz="4000" dirty="0"/>
+          </a:p>
+          <a:p>
+            <a:r>
+              <a:rPr lang="en-US" sz="4000" dirty="0"/>
+              <a:t>We use this R_T to define a framework analogous to 1-1/R0 to inform vaccination strategies to prevent disease emergence. This is given as 1-R_T_R0. </a:t>
+            </a:r>
+          </a:p>
+        </p:txBody>
+      </p:sp>
+      <p:sp>
+        <p:nvSpPr>
+          <p:cNvPr id="20" name="TextBox 19">
+            <a:extLst>
+              <a:ext uri="{FF2B5EF4-FFF2-40B4-BE49-F238E27FC236}">
+                <a16:creationId xmlns:a16="http://schemas.microsoft.com/office/drawing/2014/main" id="{5DB80DE5-9169-C4BA-EC65-80852BFFDA16}"/>
+              </a:ext>
+            </a:extLst>
+          </p:cNvPr>
+          <p:cNvSpPr txBox="1"/>
+          <p:nvPr/>
+        </p:nvSpPr>
+        <p:spPr>
+          <a:xfrm>
+            <a:off x="19495690" y="9524999"/>
+            <a:ext cx="12813110" cy="1033272"/>
+          </a:xfrm>
+          <a:prstGeom prst="rect">
+            <a:avLst/>
+          </a:prstGeom>
+          <a:solidFill>
+            <a:schemeClr val="bg2"/>
+          </a:solidFill>
+          <a:ln w="76200">
+            <a:solidFill>
+              <a:srgbClr val="002060"/>
+            </a:solidFill>
+          </a:ln>
+        </p:spPr>
+        <p:style>
+          <a:lnRef idx="2">
+            <a:schemeClr val="accent1"/>
+          </a:lnRef>
+          <a:fillRef idx="1">
+            <a:schemeClr val="lt1"/>
+          </a:fillRef>
+          <a:effectRef idx="0">
+            <a:schemeClr val="accent1"/>
+          </a:effectRef>
+          <a:fontRef idx="minor">
+            <a:schemeClr val="dk1"/>
+          </a:fontRef>
+        </p:style>
+        <p:txBody>
+          <a:bodyPr wrap="square" rtlCol="0">
+            <a:spAutoFit/>
+          </a:bodyPr>
+          <a:lstStyle/>
+          <a:p>
+            <a:pPr algn="ctr"/>
+            <a:r>
+              <a:rPr lang="en-US" sz="6000" b="1" dirty="0">
+                <a:solidFill>
+                  <a:srgbClr val="002060"/>
+                </a:solidFill>
+              </a:rPr>
+              <a:t>Results</a:t>
+            </a:r>
+          </a:p>
+        </p:txBody>
+      </p:sp>
+      <p:sp>
+        <p:nvSpPr>
+          <p:cNvPr id="21" name="TextBox 20">
+            <a:extLst>
+              <a:ext uri="{FF2B5EF4-FFF2-40B4-BE49-F238E27FC236}">
+                <a16:creationId xmlns:a16="http://schemas.microsoft.com/office/drawing/2014/main" id="{D502C1F6-8371-BB68-7F77-B2BF42766A65}"/>
+              </a:ext>
+            </a:extLst>
+          </p:cNvPr>
+          <p:cNvSpPr txBox="1"/>
+          <p:nvPr/>
+        </p:nvSpPr>
+        <p:spPr>
+          <a:xfrm>
+            <a:off x="19453779" y="20802979"/>
+            <a:ext cx="13357690" cy="1938992"/>
+          </a:xfrm>
+          <a:prstGeom prst="rect">
+            <a:avLst/>
+          </a:prstGeom>
+          <a:noFill/>
+        </p:spPr>
+        <p:txBody>
+          <a:bodyPr wrap="square">
+            <a:spAutoFit/>
+          </a:bodyPr>
+          <a:lstStyle/>
+          <a:p>
+            <a:r>
+              <a:rPr lang="en-US" sz="4000" b="1" dirty="0"/>
+              <a:t>There exists some R &lt; 1, R_T, above which evolution of sustained transmission during an outbreak may occur in the absence of intervention. </a:t>
+            </a:r>
+            <a:endParaRPr lang="en-US" sz="4000" dirty="0"/>
+          </a:p>
+        </p:txBody>
+      </p:sp>
+      <p:sp>
+        <p:nvSpPr>
+          <p:cNvPr id="22" name="TextBox 21">
+            <a:extLst>
+              <a:ext uri="{FF2B5EF4-FFF2-40B4-BE49-F238E27FC236}">
+                <a16:creationId xmlns:a16="http://schemas.microsoft.com/office/drawing/2014/main" id="{9577C550-86EB-8686-DDBB-8738D400DF96}"/>
+              </a:ext>
+            </a:extLst>
+          </p:cNvPr>
+          <p:cNvSpPr txBox="1"/>
+          <p:nvPr/>
+        </p:nvSpPr>
+        <p:spPr>
+          <a:xfrm>
+            <a:off x="19446459" y="29010936"/>
+            <a:ext cx="13315778" cy="1938992"/>
+          </a:xfrm>
+          <a:prstGeom prst="rect">
+            <a:avLst/>
+          </a:prstGeom>
+          <a:noFill/>
+        </p:spPr>
+        <p:txBody>
+          <a:bodyPr wrap="square">
+            <a:spAutoFit/>
+          </a:bodyPr>
+          <a:lstStyle/>
+          <a:p>
+            <a:r>
+              <a:rPr lang="en-US" sz="4000" b="1" dirty="0"/>
+              <a:t>A modest amount of vaccination can reduce the effective reproductive number below the threshold for adaptive evolution of a zoonotic disease with a near critical R. </a:t>
+            </a:r>
+            <a:endParaRPr lang="en-US" sz="4000" dirty="0"/>
+          </a:p>
+        </p:txBody>
+      </p:sp>
+      <p:pic>
+        <p:nvPicPr>
+          <p:cNvPr id="23" name="Picture 22" descr="A graph with lines and numbers&#10;&#10;AI-generated content may be incorrect.">
+            <a:extLst>
+              <a:ext uri="{FF2B5EF4-FFF2-40B4-BE49-F238E27FC236}">
+                <a16:creationId xmlns:a16="http://schemas.microsoft.com/office/drawing/2014/main" id="{732DEDDD-7221-A13F-C1A0-A2E46A56596F}"/>
+              </a:ext>
+            </a:extLst>
+          </p:cNvPr>
+          <p:cNvPicPr>
+            <a:picLocks noChangeAspect="1"/>
+          </p:cNvPicPr>
+          <p:nvPr/>
+        </p:nvPicPr>
+        <p:blipFill>
+          <a:blip r:embed="rId5">
+            <a:extLst>
+              <a:ext uri="{28A0092B-C50C-407E-A947-70E740481C1C}">
+                <a14:useLocalDpi xmlns:a14="http://schemas.microsoft.com/office/drawing/2010/main" val="0"/>
+              </a:ext>
+            </a:extLst>
+          </a:blip>
+          <a:srcRect l="160" t="-692" r="4736" b="692"/>
+          <a:stretch/>
+        </p:blipFill>
+        <p:spPr>
+          <a:xfrm>
+            <a:off x="22495151" y="10811255"/>
+            <a:ext cx="9889849" cy="6743956"/>
+          </a:xfrm>
+          <a:prstGeom prst="rect">
+            <a:avLst/>
+          </a:prstGeom>
+        </p:spPr>
+      </p:pic>
+      <p:sp>
+        <p:nvSpPr>
+          <p:cNvPr id="24" name="TextBox 23">
+            <a:extLst>
+              <a:ext uri="{FF2B5EF4-FFF2-40B4-BE49-F238E27FC236}">
+                <a16:creationId xmlns:a16="http://schemas.microsoft.com/office/drawing/2014/main" id="{39330D38-556E-B948-052B-48C8A9D556BC}"/>
+              </a:ext>
+            </a:extLst>
+          </p:cNvPr>
+          <p:cNvSpPr txBox="1"/>
+          <p:nvPr/>
+        </p:nvSpPr>
+        <p:spPr>
+          <a:xfrm>
+            <a:off x="23023879" y="14050758"/>
+            <a:ext cx="3352800" cy="523220"/>
+          </a:xfrm>
+          <a:prstGeom prst="rect">
+            <a:avLst/>
+          </a:prstGeom>
+          <a:noFill/>
+        </p:spPr>
+        <p:txBody>
+          <a:bodyPr wrap="square" rtlCol="0">
+            <a:spAutoFit/>
+          </a:bodyPr>
+          <a:lstStyle/>
+          <a:p>
+            <a:r>
+              <a:rPr lang="en-US" sz="2800" dirty="0" err="1"/>
+              <a:t>P</a:t>
+            </a:r>
+            <a:r>
+              <a:rPr lang="en-US" sz="2800" baseline="-25000" dirty="0" err="1"/>
+              <a:t>Emergence</a:t>
+            </a:r>
+            <a:r>
+              <a:rPr lang="en-US" sz="2800" dirty="0"/>
+              <a:t>(R</a:t>
+            </a:r>
+            <a:r>
+              <a:rPr lang="en-US" sz="2800" baseline="-25000" dirty="0"/>
+              <a:t>T</a:t>
+            </a:r>
+            <a:r>
+              <a:rPr lang="en-US" sz="2800" dirty="0"/>
+              <a:t>)</a:t>
+            </a:r>
+            <a:r>
+              <a:rPr lang="en-US" sz="2800" baseline="-25000" dirty="0"/>
+              <a:t> </a:t>
+            </a:r>
+            <a:r>
+              <a:rPr lang="en-US" sz="2800" dirty="0"/>
+              <a:t>= 10</a:t>
+            </a:r>
+            <a:r>
+              <a:rPr lang="en-US" sz="2800" baseline="30000" dirty="0"/>
+              <a:t>-5</a:t>
+            </a:r>
+            <a:endParaRPr lang="en-US" sz="2800" dirty="0"/>
+          </a:p>
+        </p:txBody>
+      </p:sp>
+      <p:sp>
+        <p:nvSpPr>
+          <p:cNvPr id="26" name="TextBox 25">
+            <a:extLst>
+              <a:ext uri="{FF2B5EF4-FFF2-40B4-BE49-F238E27FC236}">
+                <a16:creationId xmlns:a16="http://schemas.microsoft.com/office/drawing/2014/main" id="{64B2E878-8FD3-5E15-DF9B-287F97195B5B}"/>
+              </a:ext>
+            </a:extLst>
+          </p:cNvPr>
+          <p:cNvSpPr txBox="1"/>
+          <p:nvPr/>
+        </p:nvSpPr>
+        <p:spPr>
+          <a:xfrm>
+            <a:off x="19264302" y="17672613"/>
+            <a:ext cx="13167024" cy="3170099"/>
+          </a:xfrm>
+          <a:prstGeom prst="rect">
+            <a:avLst/>
+          </a:prstGeom>
+          <a:noFill/>
+        </p:spPr>
+        <p:txBody>
+          <a:bodyPr wrap="square" rtlCol="0">
+            <a:spAutoFit/>
+          </a:bodyPr>
+          <a:lstStyle/>
+          <a:p>
+            <a:pPr algn="r"/>
+            <a:r>
+              <a:rPr lang="en-US" sz="4000" b="1" dirty="0"/>
+              <a:t>Probability of evolving sustained transmission (R &gt; 1)</a:t>
+            </a:r>
+            <a:r>
+              <a:rPr lang="en-US" sz="4000" dirty="0"/>
+              <a:t>. As </a:t>
+            </a:r>
+            <a:r>
+              <a:rPr lang="en-US" sz="4000" dirty="0" err="1"/>
+              <a:t>R_e</a:t>
+            </a:r>
+            <a:r>
+              <a:rPr lang="en-US" sz="4000" dirty="0"/>
+              <a:t> increases, fewer mutations are required to evolve R &gt; 1, introducing sharp increases in emergence probability.  Delta R: proportional increase in transmissibility with mutation; mu: rate (per infection) of adaptation. </a:t>
+            </a:r>
+          </a:p>
+        </p:txBody>
+      </p:sp>
+      <p:pic>
+        <p:nvPicPr>
+          <p:cNvPr id="29" name="Picture 28" descr="A graph showing different colors&#10;&#10;AI-generated content may be incorrect.">
+            <a:extLst>
+              <a:ext uri="{FF2B5EF4-FFF2-40B4-BE49-F238E27FC236}">
+                <a16:creationId xmlns:a16="http://schemas.microsoft.com/office/drawing/2014/main" id="{D7EDA2E2-4648-1841-C931-D3CD6CA7C65F}"/>
+              </a:ext>
+            </a:extLst>
+          </p:cNvPr>
+          <p:cNvPicPr>
+            <a:picLocks noChangeAspect="1"/>
+          </p:cNvPicPr>
+          <p:nvPr/>
+        </p:nvPicPr>
+        <p:blipFill>
+          <a:blip r:embed="rId6">
+            <a:extLst>
+              <a:ext uri="{28A0092B-C50C-407E-A947-70E740481C1C}">
+                <a14:useLocalDpi xmlns:a14="http://schemas.microsoft.com/office/drawing/2010/main" val="0"/>
+              </a:ext>
+            </a:extLst>
+          </a:blip>
+          <a:stretch>
+            <a:fillRect/>
+          </a:stretch>
+        </p:blipFill>
+        <p:spPr>
+          <a:xfrm>
+            <a:off x="19450575" y="22770499"/>
+            <a:ext cx="9332682" cy="6054429"/>
+          </a:xfrm>
+          <a:prstGeom prst="rect">
+            <a:avLst/>
+          </a:prstGeom>
+        </p:spPr>
+      </p:pic>
+      <p:pic>
+        <p:nvPicPr>
+          <p:cNvPr id="30" name="Picture 29" descr="A screenshot of a graph&#10;&#10;AI-generated content may be incorrect.">
+            <a:extLst>
+              <a:ext uri="{FF2B5EF4-FFF2-40B4-BE49-F238E27FC236}">
+                <a16:creationId xmlns:a16="http://schemas.microsoft.com/office/drawing/2014/main" id="{BCEC7190-7419-EC22-875C-F7D3344F8FAB}"/>
+              </a:ext>
+            </a:extLst>
+          </p:cNvPr>
+          <p:cNvPicPr>
+            <a:picLocks noChangeAspect="1"/>
+          </p:cNvPicPr>
+          <p:nvPr/>
+        </p:nvPicPr>
+        <p:blipFill>
+          <a:blip r:embed="rId7">
+            <a:extLst>
+              <a:ext uri="{28A0092B-C50C-407E-A947-70E740481C1C}">
+                <a14:useLocalDpi xmlns:a14="http://schemas.microsoft.com/office/drawing/2010/main" val="0"/>
+              </a:ext>
+            </a:extLst>
+          </a:blip>
+          <a:stretch>
+            <a:fillRect/>
+          </a:stretch>
+        </p:blipFill>
+        <p:spPr>
+          <a:xfrm>
+            <a:off x="23023879" y="31027471"/>
+            <a:ext cx="9361121" cy="8215529"/>
+          </a:xfrm>
+          <a:prstGeom prst="rect">
+            <a:avLst/>
+          </a:prstGeom>
+        </p:spPr>
+      </p:pic>
+      <p:sp>
+        <p:nvSpPr>
+          <p:cNvPr id="3" name="TextBox 2">
+            <a:extLst>
+              <a:ext uri="{FF2B5EF4-FFF2-40B4-BE49-F238E27FC236}">
+                <a16:creationId xmlns:a16="http://schemas.microsoft.com/office/drawing/2014/main" id="{500C6E18-789B-DEA1-B96D-D854A0CE3FCB}"/>
+              </a:ext>
+            </a:extLst>
+          </p:cNvPr>
+          <p:cNvSpPr txBox="1"/>
+          <p:nvPr/>
+        </p:nvSpPr>
+        <p:spPr>
+          <a:xfrm>
+            <a:off x="324639" y="34840226"/>
+            <a:ext cx="6368596" cy="3785652"/>
+          </a:xfrm>
+          <a:prstGeom prst="rect">
+            <a:avLst/>
+          </a:prstGeom>
+          <a:noFill/>
+        </p:spPr>
+        <p:txBody>
+          <a:bodyPr wrap="square">
+            <a:spAutoFit/>
+          </a:bodyPr>
+          <a:lstStyle/>
+          <a:p>
+            <a:r>
+              <a:rPr lang="en-US" sz="4000" dirty="0"/>
+              <a:t>We find that models levels of vaccination can dramatically reduce the probability of disease emergence by adaptive evolution in transmission chains. </a:t>
+            </a:r>
+          </a:p>
+        </p:txBody>
+      </p:sp>
+    </p:spTree>
+    <p:extLst>
+      <p:ext uri="{BB962C8B-B14F-4D97-AF65-F5344CB8AC3E}">
+        <p14:creationId xmlns:p14="http://schemas.microsoft.com/office/powerpoint/2010/main" val="3344519979"/>
+      </p:ext>
+    </p:extLst>
+  </p:cSld>
+  <p:clrMapOvr>
+    <a:masterClrMapping/>
+  </p:clrMapOvr>
+</p:sld>
+</file>
+
+<file path=ppt/slides/slide5.xml><?xml version="1.0" encoding="utf-8"?>
+<p:sld xmlns:a="http://schemas.openxmlformats.org/drawingml/2006/main" xmlns:r="http://schemas.openxmlformats.org/officeDocument/2006/relationships" xmlns:p="http://schemas.openxmlformats.org/presentationml/2006/main">
+  <p:cSld>
+    <p:bg>
+      <p:bgPr>
+        <a:solidFill>
+          <a:srgbClr val="002060"/>
+        </a:solidFill>
+        <a:effectLst/>
+      </p:bgPr>
+    </p:bg>
+    <p:spTree>
+      <p:nvGrpSpPr>
+        <p:cNvPr id="1" name="">
+          <a:extLst>
+            <a:ext uri="{FF2B5EF4-FFF2-40B4-BE49-F238E27FC236}">
               <a16:creationId xmlns:a16="http://schemas.microsoft.com/office/drawing/2014/main" id="{80A5B3E0-CAC0-565C-5BD9-47AB6FCA8514}"/>
             </a:ext>
           </a:extLst>
